--- a/курсач/курсовая/презентация.pptx
+++ b/курсач/курсовая/презентация.pptx
@@ -250,7 +250,7 @@
           <a:p>
             <a:fld id="{BF6A742F-06BB-4F49-82EA-40B155807A83}" type="datetimeFigureOut">
               <a:rPr lang="ru-RU" smtClean="0"/>
-              <a:t>15.04.2026</a:t>
+              <a:t>19.04.2026</a:t>
             </a:fld>
             <a:endParaRPr lang="ru-RU"/>
           </a:p>
@@ -764,7 +764,7 @@
           <a:p>
             <a:fld id="{E139295C-1C7B-4648-87F0-42E1ABBAE4B3}" type="datetimeFigureOut">
               <a:rPr lang="ru-RU" smtClean="0"/>
-              <a:t>15.04.2026</a:t>
+              <a:t>19.04.2026</a:t>
             </a:fld>
             <a:endParaRPr lang="ru-RU"/>
           </a:p>
@@ -946,7 +946,7 @@
           <a:p>
             <a:fld id="{E139295C-1C7B-4648-87F0-42E1ABBAE4B3}" type="datetimeFigureOut">
               <a:rPr lang="ru-RU" smtClean="0"/>
-              <a:t>15.04.2026</a:t>
+              <a:t>19.04.2026</a:t>
             </a:fld>
             <a:endParaRPr lang="ru-RU"/>
           </a:p>
@@ -1138,7 +1138,7 @@
           <a:p>
             <a:fld id="{E139295C-1C7B-4648-87F0-42E1ABBAE4B3}" type="datetimeFigureOut">
               <a:rPr lang="ru-RU" smtClean="0"/>
-              <a:t>15.04.2026</a:t>
+              <a:t>19.04.2026</a:t>
             </a:fld>
             <a:endParaRPr lang="ru-RU"/>
           </a:p>
@@ -1320,7 +1320,7 @@
           <a:p>
             <a:fld id="{E139295C-1C7B-4648-87F0-42E1ABBAE4B3}" type="datetimeFigureOut">
               <a:rPr lang="ru-RU" smtClean="0"/>
-              <a:t>15.04.2026</a:t>
+              <a:t>19.04.2026</a:t>
             </a:fld>
             <a:endParaRPr lang="ru-RU"/>
           </a:p>
@@ -1600,7 +1600,7 @@
           <a:p>
             <a:fld id="{E139295C-1C7B-4648-87F0-42E1ABBAE4B3}" type="datetimeFigureOut">
               <a:rPr lang="ru-RU" smtClean="0"/>
-              <a:t>15.04.2026</a:t>
+              <a:t>19.04.2026</a:t>
             </a:fld>
             <a:endParaRPr lang="ru-RU"/>
           </a:p>
@@ -1844,7 +1844,7 @@
           <a:p>
             <a:fld id="{E139295C-1C7B-4648-87F0-42E1ABBAE4B3}" type="datetimeFigureOut">
               <a:rPr lang="ru-RU" smtClean="0"/>
-              <a:t>15.04.2026</a:t>
+              <a:t>19.04.2026</a:t>
             </a:fld>
             <a:endParaRPr lang="ru-RU"/>
           </a:p>
@@ -2211,7 +2211,7 @@
           <a:p>
             <a:fld id="{E139295C-1C7B-4648-87F0-42E1ABBAE4B3}" type="datetimeFigureOut">
               <a:rPr lang="ru-RU" smtClean="0"/>
-              <a:t>15.04.2026</a:t>
+              <a:t>19.04.2026</a:t>
             </a:fld>
             <a:endParaRPr lang="ru-RU"/>
           </a:p>
@@ -2364,7 +2364,7 @@
           <a:p>
             <a:fld id="{E139295C-1C7B-4648-87F0-42E1ABBAE4B3}" type="datetimeFigureOut">
               <a:rPr lang="ru-RU" smtClean="0"/>
-              <a:t>15.04.2026</a:t>
+              <a:t>19.04.2026</a:t>
             </a:fld>
             <a:endParaRPr lang="ru-RU"/>
           </a:p>
@@ -2471,7 +2471,7 @@
           <a:p>
             <a:fld id="{E139295C-1C7B-4648-87F0-42E1ABBAE4B3}" type="datetimeFigureOut">
               <a:rPr lang="ru-RU" smtClean="0"/>
-              <a:t>15.04.2026</a:t>
+              <a:t>19.04.2026</a:t>
             </a:fld>
             <a:endParaRPr lang="ru-RU"/>
           </a:p>
@@ -2840,7 +2840,7 @@
           <a:p>
             <a:fld id="{E139295C-1C7B-4648-87F0-42E1ABBAE4B3}" type="datetimeFigureOut">
               <a:rPr lang="ru-RU" smtClean="0"/>
-              <a:t>15.04.2026</a:t>
+              <a:t>19.04.2026</a:t>
             </a:fld>
             <a:endParaRPr lang="ru-RU"/>
           </a:p>
@@ -3208,7 +3208,7 @@
           <a:p>
             <a:fld id="{E139295C-1C7B-4648-87F0-42E1ABBAE4B3}" type="datetimeFigureOut">
               <a:rPr lang="ru-RU" smtClean="0"/>
-              <a:t>15.04.2026</a:t>
+              <a:t>19.04.2026</a:t>
             </a:fld>
             <a:endParaRPr lang="ru-RU"/>
           </a:p>
@@ -3460,7 +3460,7 @@
           <a:p>
             <a:fld id="{E139295C-1C7B-4648-87F0-42E1ABBAE4B3}" type="datetimeFigureOut">
               <a:rPr lang="ru-RU" smtClean="0"/>
-              <a:t>15.04.2026</a:t>
+              <a:t>19.04.2026</a:t>
             </a:fld>
             <a:endParaRPr lang="ru-RU"/>
           </a:p>
@@ -4657,13 +4657,13 @@
           <p:nvPr>
             <p:extLst>
               <p:ext uri="{D42A27DB-BD31-4B8C-83A1-F6EECF244321}">
-                <p14:modId xmlns:p14="http://schemas.microsoft.com/office/powerpoint/2010/main" val="1976378110"/>
+                <p14:modId xmlns:p14="http://schemas.microsoft.com/office/powerpoint/2010/main" val="3365183891"/>
               </p:ext>
             </p:extLst>
           </p:nvPr>
         </p:nvGraphicFramePr>
         <p:xfrm>
-          <a:off x="310434" y="2445711"/>
+          <a:off x="563154" y="2456828"/>
           <a:ext cx="3636554" cy="1051739"/>
         </p:xfrm>
         <a:graphic>
@@ -4697,18 +4697,11 @@
                           <a:ea typeface="+mn-ea"/>
                           <a:cs typeface="+mn-cs"/>
                         </a:rPr>
-                        <a:t>SELECT * FROM Property</a:t>
+                        <a:t>SELECT * FROM properties</a:t>
                       </a:r>
-                      <a:br>
-                        <a:rPr lang="en-US" sz="2000" kern="1200" dirty="0">
-                          <a:solidFill>
-                            <a:schemeClr val="dk1"/>
-                          </a:solidFill>
-                          <a:latin typeface="Consolas" panose="020B0609020204030204" pitchFamily="49" charset="0"/>
-                          <a:ea typeface="+mn-ea"/>
-                          <a:cs typeface="+mn-cs"/>
-                        </a:rPr>
-                      </a:br>
+                    </a:p>
+                    <a:p>
+                      <a:pPr marL="0" algn="l" defTabSz="914400" rtl="0" eaLnBrk="1" latinLnBrk="0" hangingPunct="1"/>
                       <a:r>
                         <a:rPr lang="en-US" sz="2000" kern="1200" dirty="0">
                           <a:solidFill>
@@ -4720,16 +4713,9 @@
                         </a:rPr>
                         <a:t>WHERE available = 1</a:t>
                       </a:r>
-                      <a:br>
-                        <a:rPr lang="en-US" sz="2000" kern="1200" dirty="0">
-                          <a:solidFill>
-                            <a:schemeClr val="dk1"/>
-                          </a:solidFill>
-                          <a:latin typeface="Consolas" panose="020B0609020204030204" pitchFamily="49" charset="0"/>
-                          <a:ea typeface="+mn-ea"/>
-                          <a:cs typeface="+mn-cs"/>
-                        </a:rPr>
-                      </a:br>
+                    </a:p>
+                    <a:p>
+                      <a:pPr marL="0" algn="l" defTabSz="914400" rtl="0" eaLnBrk="1" latinLnBrk="0" hangingPunct="1"/>
                       <a:r>
                         <a:rPr lang="en-US" sz="2000" kern="1200" dirty="0">
                           <a:solidFill>
@@ -4819,7 +4805,7 @@
         </p:nvSpPr>
         <p:spPr>
           <a:xfrm>
-            <a:off x="154405" y="3429000"/>
+            <a:off x="485139" y="3429000"/>
             <a:ext cx="3792583" cy="276999"/>
           </a:xfrm>
           <a:prstGeom prst="rect">
@@ -4839,7 +4825,7 @@
                 <a:latin typeface="Arial" panose="020B0604020202020204" pitchFamily="34" charset="0"/>
                 <a:cs typeface="Arial" panose="020B0604020202020204" pitchFamily="34" charset="0"/>
               </a:rPr>
-              <a:t>Получение списка доступных объявлений.</a:t>
+              <a:t>Получение объявлений</a:t>
             </a:r>
           </a:p>
         </p:txBody>
@@ -4859,7 +4845,7 @@
           <p:nvPr>
             <p:extLst>
               <p:ext uri="{D42A27DB-BD31-4B8C-83A1-F6EECF244321}">
-                <p14:modId xmlns:p14="http://schemas.microsoft.com/office/powerpoint/2010/main" val="4031074474"/>
+                <p14:modId xmlns:p14="http://schemas.microsoft.com/office/powerpoint/2010/main" val="1422574822"/>
               </p:ext>
             </p:extLst>
           </p:nvPr>
@@ -4898,7 +4884,20 @@
                           <a:ea typeface="+mn-ea"/>
                           <a:cs typeface="+mn-cs"/>
                         </a:rPr>
-                        <a:t>INSERT INTO Property (</a:t>
+                        <a:t>INSERT INTO requests</a:t>
+                      </a:r>
+                    </a:p>
+                    <a:p>
+                      <a:r>
+                        <a:rPr lang="en-US" sz="2000" kern="1200" dirty="0">
+                          <a:solidFill>
+                            <a:schemeClr val="dk1"/>
+                          </a:solidFill>
+                          <a:latin typeface="Consolas" panose="020B0609020204030204" pitchFamily="49" charset="0"/>
+                          <a:ea typeface="+mn-ea"/>
+                          <a:cs typeface="+mn-cs"/>
+                        </a:rPr>
+                        <a:t>(</a:t>
                       </a:r>
                       <a:r>
                         <a:rPr lang="en-US" sz="2000" kern="1200" dirty="0" err="1">
@@ -4909,7 +4908,7 @@
                           <a:ea typeface="+mn-ea"/>
                           <a:cs typeface="+mn-cs"/>
                         </a:rPr>
-                        <a:t>landlord_id</a:t>
+                        <a:t>user_id</a:t>
                       </a:r>
                       <a:r>
                         <a:rPr lang="en-US" sz="2000" kern="1200" dirty="0">
@@ -4920,10 +4919,10 @@
                           <a:ea typeface="+mn-ea"/>
                           <a:cs typeface="+mn-cs"/>
                         </a:rPr>
-                        <a:t>, title, address, price, available)</a:t>
+                        <a:t>, </a:t>
                       </a:r>
-                      <a:br>
-                        <a:rPr lang="en-US" sz="2000" kern="1200" dirty="0">
+                      <a:r>
+                        <a:rPr lang="en-US" sz="2000" kern="1200" dirty="0" err="1">
                           <a:solidFill>
                             <a:schemeClr val="dk1"/>
                           </a:solidFill>
@@ -4931,7 +4930,8 @@
                           <a:ea typeface="+mn-ea"/>
                           <a:cs typeface="+mn-cs"/>
                         </a:rPr>
-                      </a:br>
+                        <a:t>property_id</a:t>
+                      </a:r>
                       <a:r>
                         <a:rPr lang="en-US" sz="2000" kern="1200" dirty="0">
                           <a:solidFill>
@@ -4941,7 +4941,20 @@
                           <a:ea typeface="+mn-ea"/>
                           <a:cs typeface="+mn-cs"/>
                         </a:rPr>
-                        <a:t>VALUES (?, ?, ?, ?, ?);</a:t>
+                        <a:t>, comment, status)</a:t>
+                      </a:r>
+                    </a:p>
+                    <a:p>
+                      <a:r>
+                        <a:rPr lang="en-US" sz="2000" kern="1200" dirty="0">
+                          <a:solidFill>
+                            <a:schemeClr val="dk1"/>
+                          </a:solidFill>
+                          <a:latin typeface="Consolas" panose="020B0609020204030204" pitchFamily="49" charset="0"/>
+                          <a:ea typeface="+mn-ea"/>
+                          <a:cs typeface="+mn-cs"/>
+                        </a:rPr>
+                        <a:t>VALUES (?, ?, ?, 'pending');</a:t>
                       </a:r>
                       <a:endParaRPr lang="ru-RU" sz="2000" kern="1200" dirty="0">
                         <a:solidFill>
@@ -5022,7 +5035,7 @@
         <p:spPr>
           <a:xfrm>
             <a:off x="6284517" y="3447047"/>
-            <a:ext cx="3792583" cy="461665"/>
+            <a:ext cx="3792583" cy="276999"/>
           </a:xfrm>
           <a:prstGeom prst="rect">
             <a:avLst/>
@@ -5041,7 +5054,7 @@
                 <a:latin typeface="Arial" panose="020B0604020202020204" pitchFamily="34" charset="0"/>
                 <a:cs typeface="Arial" panose="020B0604020202020204" pitchFamily="34" charset="0"/>
               </a:rPr>
-              <a:t>Добавление нового объекта недвижимости через админ-панель.</a:t>
+              <a:t>Создание заявки</a:t>
             </a:r>
           </a:p>
         </p:txBody>
@@ -5061,14 +5074,14 @@
           <p:nvPr>
             <p:extLst>
               <p:ext uri="{D42A27DB-BD31-4B8C-83A1-F6EECF244321}">
-                <p14:modId xmlns:p14="http://schemas.microsoft.com/office/powerpoint/2010/main" val="631802604"/>
+                <p14:modId xmlns:p14="http://schemas.microsoft.com/office/powerpoint/2010/main" val="4198675331"/>
               </p:ext>
             </p:extLst>
           </p:nvPr>
         </p:nvGraphicFramePr>
         <p:xfrm>
-          <a:off x="1307737" y="4413686"/>
-          <a:ext cx="9576527" cy="850604"/>
+          <a:off x="563154" y="4307096"/>
+          <a:ext cx="3636554" cy="1061431"/>
         </p:xfrm>
         <a:graphic>
           <a:graphicData uri="http://schemas.openxmlformats.org/drawingml/2006/table">
@@ -5077,7 +5090,7 @@
                 <a:tableStyleId>{073A0DAA-6AF3-43AB-8588-CEC1D06C72B9}</a:tableStyleId>
               </a:tblPr>
               <a:tblGrid>
-                <a:gridCol w="9576527">
+                <a:gridCol w="3636554">
                   <a:extLst>
                     <a:ext uri="{9D8B030D-6E8A-4147-A177-3AD203B41FA5}">
                       <a16:colId xmlns:a16="http://schemas.microsoft.com/office/drawing/2014/main" val="4065547788"/>
@@ -5085,7 +5098,7 @@
                   </a:extLst>
                 </a:gridCol>
               </a:tblGrid>
-              <a:tr h="850604">
+              <a:tr h="1061431">
                 <a:tc>
                   <a:txBody>
                     <a:bodyPr/>
@@ -5100,9 +5113,11 @@
                           <a:ea typeface="+mn-ea"/>
                           <a:cs typeface="+mn-cs"/>
                         </a:rPr>
-                        <a:t>DELETE FROM Property</a:t>
+                        <a:t>UPDATE requests</a:t>
                       </a:r>
-                      <a:br>
+                    </a:p>
+                    <a:p>
+                      <a:r>
                         <a:rPr lang="en-US" sz="2000" kern="1200" dirty="0">
                           <a:solidFill>
                             <a:schemeClr val="dk1"/>
@@ -5111,7 +5126,10 @@
                           <a:ea typeface="+mn-ea"/>
                           <a:cs typeface="+mn-cs"/>
                         </a:rPr>
-                      </a:br>
+                        <a:t>SET status = 'approved'</a:t>
+                      </a:r>
+                    </a:p>
+                    <a:p>
                       <a:r>
                         <a:rPr lang="en-US" sz="2000" kern="1200" dirty="0">
                           <a:solidFill>
@@ -5201,7 +5219,7 @@
         </p:nvSpPr>
         <p:spPr>
           <a:xfrm>
-            <a:off x="4199708" y="5199214"/>
+            <a:off x="407125" y="5337713"/>
             <a:ext cx="3792583" cy="276999"/>
           </a:xfrm>
           <a:prstGeom prst="rect">
@@ -5221,16 +5239,357 @@
                 <a:latin typeface="Arial" panose="020B0604020202020204" pitchFamily="34" charset="0"/>
                 <a:cs typeface="Arial" panose="020B0604020202020204" pitchFamily="34" charset="0"/>
               </a:rPr>
-              <a:t>Удаление объявления из базы данных</a:t>
-            </a:r>
-            <a:r>
-              <a:rPr lang="ru-RU" sz="1200" dirty="0"/>
-              <a:t>.</a:t>
-            </a:r>
-            <a:endParaRPr lang="ru-RU" sz="1200" dirty="0">
-              <a:latin typeface="Arial" panose="020B0604020202020204" pitchFamily="34" charset="0"/>
-              <a:cs typeface="Arial" panose="020B0604020202020204" pitchFamily="34" charset="0"/>
-            </a:endParaRPr>
+              <a:t>Одобрение заявки администратором</a:t>
+            </a:r>
+          </a:p>
+        </p:txBody>
+      </p:sp>
+      <p:graphicFrame>
+        <p:nvGraphicFramePr>
+          <p:cNvPr id="13" name="Таблица 6">
+            <a:extLst>
+              <a:ext uri="{FF2B5EF4-FFF2-40B4-BE49-F238E27FC236}">
+                <a16:creationId xmlns:a16="http://schemas.microsoft.com/office/drawing/2014/main" id="{6EB55AF7-1681-4817-A28E-DE7E603DBB4B}"/>
+              </a:ext>
+            </a:extLst>
+          </p:cNvPr>
+          <p:cNvGraphicFramePr>
+            <a:graphicFrameLocks noGrp="1"/>
+          </p:cNvGraphicFramePr>
+          <p:nvPr>
+            <p:extLst>
+              <p:ext uri="{D42A27DB-BD31-4B8C-83A1-F6EECF244321}">
+                <p14:modId xmlns:p14="http://schemas.microsoft.com/office/powerpoint/2010/main" val="3012948815"/>
+              </p:ext>
+            </p:extLst>
+          </p:nvPr>
+        </p:nvGraphicFramePr>
+        <p:xfrm>
+          <a:off x="4529439" y="3849916"/>
+          <a:ext cx="7178424" cy="2529840"/>
+        </p:xfrm>
+        <a:graphic>
+          <a:graphicData uri="http://schemas.openxmlformats.org/drawingml/2006/table">
+            <a:tbl>
+              <a:tblPr bandRow="1">
+                <a:tableStyleId>{073A0DAA-6AF3-43AB-8588-CEC1D06C72B9}</a:tableStyleId>
+              </a:tblPr>
+              <a:tblGrid>
+                <a:gridCol w="7178424">
+                  <a:extLst>
+                    <a:ext uri="{9D8B030D-6E8A-4147-A177-3AD203B41FA5}">
+                      <a16:colId xmlns:a16="http://schemas.microsoft.com/office/drawing/2014/main" val="4065547788"/>
+                    </a:ext>
+                  </a:extLst>
+                </a:gridCol>
+              </a:tblGrid>
+              <a:tr h="2340351">
+                <a:tc>
+                  <a:txBody>
+                    <a:bodyPr/>
+                    <a:lstStyle/>
+                    <a:p>
+                      <a:pPr marL="0" algn="l" defTabSz="914400" rtl="0" eaLnBrk="1" latinLnBrk="0" hangingPunct="1"/>
+                      <a:r>
+                        <a:rPr lang="en-US" sz="1600" kern="1200" dirty="0">
+                          <a:solidFill>
+                            <a:schemeClr val="dk1"/>
+                          </a:solidFill>
+                          <a:latin typeface="Consolas" panose="020B0609020204030204" pitchFamily="49" charset="0"/>
+                          <a:ea typeface="+mn-ea"/>
+                          <a:cs typeface="+mn-cs"/>
+                        </a:rPr>
+                        <a:t>CREATE TRIGGER </a:t>
+                      </a:r>
+                      <a:r>
+                        <a:rPr lang="en-US" sz="1600" kern="1200" dirty="0" err="1">
+                          <a:solidFill>
+                            <a:schemeClr val="dk1"/>
+                          </a:solidFill>
+                          <a:latin typeface="Consolas" panose="020B0609020204030204" pitchFamily="49" charset="0"/>
+                          <a:ea typeface="+mn-ea"/>
+                          <a:cs typeface="+mn-cs"/>
+                        </a:rPr>
+                        <a:t>request_approved_update_property</a:t>
+                      </a:r>
+                      <a:endParaRPr lang="en-US" sz="1600" kern="1200" dirty="0">
+                        <a:solidFill>
+                          <a:schemeClr val="dk1"/>
+                        </a:solidFill>
+                        <a:latin typeface="Consolas" panose="020B0609020204030204" pitchFamily="49" charset="0"/>
+                        <a:ea typeface="+mn-ea"/>
+                        <a:cs typeface="+mn-cs"/>
+                      </a:endParaRPr>
+                    </a:p>
+                    <a:p>
+                      <a:pPr marL="0" algn="l" defTabSz="914400" rtl="0" eaLnBrk="1" latinLnBrk="0" hangingPunct="1"/>
+                      <a:r>
+                        <a:rPr lang="en-US" sz="1600" kern="1200" dirty="0">
+                          <a:solidFill>
+                            <a:schemeClr val="dk1"/>
+                          </a:solidFill>
+                          <a:latin typeface="Consolas" panose="020B0609020204030204" pitchFamily="49" charset="0"/>
+                          <a:ea typeface="+mn-ea"/>
+                          <a:cs typeface="+mn-cs"/>
+                        </a:rPr>
+                        <a:t>AFTER UPDATE OF status ON requests</a:t>
+                      </a:r>
+                    </a:p>
+                    <a:p>
+                      <a:pPr marL="0" algn="l" defTabSz="914400" rtl="0" eaLnBrk="1" latinLnBrk="0" hangingPunct="1"/>
+                      <a:r>
+                        <a:rPr lang="en-US" sz="1600" kern="1200" dirty="0">
+                          <a:solidFill>
+                            <a:schemeClr val="dk1"/>
+                          </a:solidFill>
+                          <a:latin typeface="Consolas" panose="020B0609020204030204" pitchFamily="49" charset="0"/>
+                          <a:ea typeface="+mn-ea"/>
+                          <a:cs typeface="+mn-cs"/>
+                        </a:rPr>
+                        <a:t>FOR EACH ROW</a:t>
+                      </a:r>
+                    </a:p>
+                    <a:p>
+                      <a:pPr marL="0" algn="l" defTabSz="914400" rtl="0" eaLnBrk="1" latinLnBrk="0" hangingPunct="1"/>
+                      <a:r>
+                        <a:rPr lang="en-US" sz="1600" kern="1200" dirty="0">
+                          <a:solidFill>
+                            <a:schemeClr val="dk1"/>
+                          </a:solidFill>
+                          <a:latin typeface="Consolas" panose="020B0609020204030204" pitchFamily="49" charset="0"/>
+                          <a:ea typeface="+mn-ea"/>
+                          <a:cs typeface="+mn-cs"/>
+                        </a:rPr>
+                        <a:t>WHEN </a:t>
+                      </a:r>
+                      <a:r>
+                        <a:rPr lang="en-US" sz="1600" kern="1200" dirty="0" err="1">
+                          <a:solidFill>
+                            <a:schemeClr val="dk1"/>
+                          </a:solidFill>
+                          <a:latin typeface="Consolas" panose="020B0609020204030204" pitchFamily="49" charset="0"/>
+                          <a:ea typeface="+mn-ea"/>
+                          <a:cs typeface="+mn-cs"/>
+                        </a:rPr>
+                        <a:t>NEW.status</a:t>
+                      </a:r>
+                      <a:r>
+                        <a:rPr lang="en-US" sz="1600" kern="1200" dirty="0">
+                          <a:solidFill>
+                            <a:schemeClr val="dk1"/>
+                          </a:solidFill>
+                          <a:latin typeface="Consolas" panose="020B0609020204030204" pitchFamily="49" charset="0"/>
+                          <a:ea typeface="+mn-ea"/>
+                          <a:cs typeface="+mn-cs"/>
+                        </a:rPr>
+                        <a:t> = 'approved'</a:t>
+                      </a:r>
+                    </a:p>
+                    <a:p>
+                      <a:pPr marL="0" algn="l" defTabSz="914400" rtl="0" eaLnBrk="1" latinLnBrk="0" hangingPunct="1"/>
+                      <a:r>
+                        <a:rPr lang="en-US" sz="1600" kern="1200" dirty="0">
+                          <a:solidFill>
+                            <a:schemeClr val="dk1"/>
+                          </a:solidFill>
+                          <a:latin typeface="Consolas" panose="020B0609020204030204" pitchFamily="49" charset="0"/>
+                          <a:ea typeface="+mn-ea"/>
+                          <a:cs typeface="+mn-cs"/>
+                        </a:rPr>
+                        <a:t>BEGIN</a:t>
+                      </a:r>
+                    </a:p>
+                    <a:p>
+                      <a:pPr marL="0" algn="l" defTabSz="914400" rtl="0" eaLnBrk="1" latinLnBrk="0" hangingPunct="1"/>
+                      <a:r>
+                        <a:rPr lang="en-US" sz="1600" kern="1200" dirty="0">
+                          <a:solidFill>
+                            <a:schemeClr val="dk1"/>
+                          </a:solidFill>
+                          <a:latin typeface="Consolas" panose="020B0609020204030204" pitchFamily="49" charset="0"/>
+                          <a:ea typeface="+mn-ea"/>
+                          <a:cs typeface="+mn-cs"/>
+                        </a:rPr>
+                        <a:t>    UPDATE properties</a:t>
+                      </a:r>
+                    </a:p>
+                    <a:p>
+                      <a:pPr marL="0" algn="l" defTabSz="914400" rtl="0" eaLnBrk="1" latinLnBrk="0" hangingPunct="1"/>
+                      <a:r>
+                        <a:rPr lang="en-US" sz="1600" kern="1200" dirty="0">
+                          <a:solidFill>
+                            <a:schemeClr val="dk1"/>
+                          </a:solidFill>
+                          <a:latin typeface="Consolas" panose="020B0609020204030204" pitchFamily="49" charset="0"/>
+                          <a:ea typeface="+mn-ea"/>
+                          <a:cs typeface="+mn-cs"/>
+                        </a:rPr>
+                        <a:t>    SET available = 0,</a:t>
+                      </a:r>
+                    </a:p>
+                    <a:p>
+                      <a:pPr marL="0" algn="l" defTabSz="914400" rtl="0" eaLnBrk="1" latinLnBrk="0" hangingPunct="1"/>
+                      <a:r>
+                        <a:rPr lang="en-US" sz="1600" kern="1200" dirty="0">
+                          <a:solidFill>
+                            <a:schemeClr val="dk1"/>
+                          </a:solidFill>
+                          <a:latin typeface="Consolas" panose="020B0609020204030204" pitchFamily="49" charset="0"/>
+                          <a:ea typeface="+mn-ea"/>
+                          <a:cs typeface="+mn-cs"/>
+                        </a:rPr>
+                        <a:t>        status = 'approved'</a:t>
+                      </a:r>
+                    </a:p>
+                    <a:p>
+                      <a:pPr marL="0" algn="l" defTabSz="914400" rtl="0" eaLnBrk="1" latinLnBrk="0" hangingPunct="1"/>
+                      <a:r>
+                        <a:rPr lang="en-US" sz="1600" kern="1200" dirty="0">
+                          <a:solidFill>
+                            <a:schemeClr val="dk1"/>
+                          </a:solidFill>
+                          <a:latin typeface="Consolas" panose="020B0609020204030204" pitchFamily="49" charset="0"/>
+                          <a:ea typeface="+mn-ea"/>
+                          <a:cs typeface="+mn-cs"/>
+                        </a:rPr>
+                        <a:t>    WHERE id = </a:t>
+                      </a:r>
+                      <a:r>
+                        <a:rPr lang="en-US" sz="1600" kern="1200" dirty="0" err="1">
+                          <a:solidFill>
+                            <a:schemeClr val="dk1"/>
+                          </a:solidFill>
+                          <a:latin typeface="Consolas" panose="020B0609020204030204" pitchFamily="49" charset="0"/>
+                          <a:ea typeface="+mn-ea"/>
+                          <a:cs typeface="+mn-cs"/>
+                        </a:rPr>
+                        <a:t>NEW.property_id</a:t>
+                      </a:r>
+                      <a:r>
+                        <a:rPr lang="en-US" sz="1600" kern="1200" dirty="0">
+                          <a:solidFill>
+                            <a:schemeClr val="dk1"/>
+                          </a:solidFill>
+                          <a:latin typeface="Consolas" panose="020B0609020204030204" pitchFamily="49" charset="0"/>
+                          <a:ea typeface="+mn-ea"/>
+                          <a:cs typeface="+mn-cs"/>
+                        </a:rPr>
+                        <a:t>;</a:t>
+                      </a:r>
+                    </a:p>
+                    <a:p>
+                      <a:pPr marL="0" algn="l" defTabSz="914400" rtl="0" eaLnBrk="1" latinLnBrk="0" hangingPunct="1"/>
+                      <a:r>
+                        <a:rPr lang="en-US" sz="1600" kern="1200" dirty="0">
+                          <a:solidFill>
+                            <a:schemeClr val="dk1"/>
+                          </a:solidFill>
+                          <a:latin typeface="Consolas" panose="020B0609020204030204" pitchFamily="49" charset="0"/>
+                          <a:ea typeface="+mn-ea"/>
+                          <a:cs typeface="+mn-cs"/>
+                        </a:rPr>
+                        <a:t>END;</a:t>
+                      </a:r>
+                      <a:endParaRPr lang="ru-RU" sz="1600" kern="1200" dirty="0">
+                        <a:solidFill>
+                          <a:schemeClr val="dk1"/>
+                        </a:solidFill>
+                        <a:latin typeface="Consolas" panose="020B0609020204030204" pitchFamily="49" charset="0"/>
+                        <a:ea typeface="+mn-ea"/>
+                        <a:cs typeface="+mn-cs"/>
+                      </a:endParaRPr>
+                    </a:p>
+                  </a:txBody>
+                  <a:tcPr>
+                    <a:lnL w="12700" cap="flat" cmpd="sng" algn="ctr">
+                      <a:solidFill>
+                        <a:schemeClr val="tx1"/>
+                      </a:solidFill>
+                      <a:prstDash val="solid"/>
+                      <a:round/>
+                      <a:headEnd type="none" w="med" len="med"/>
+                      <a:tailEnd type="none" w="med" len="med"/>
+                    </a:lnL>
+                    <a:lnR w="12700" cap="flat" cmpd="sng" algn="ctr">
+                      <a:solidFill>
+                        <a:schemeClr val="tx1"/>
+                      </a:solidFill>
+                      <a:prstDash val="solid"/>
+                      <a:round/>
+                      <a:headEnd type="none" w="med" len="med"/>
+                      <a:tailEnd type="none" w="med" len="med"/>
+                    </a:lnR>
+                    <a:lnT w="12700" cap="flat" cmpd="sng" algn="ctr">
+                      <a:solidFill>
+                        <a:schemeClr val="tx1"/>
+                      </a:solidFill>
+                      <a:prstDash val="solid"/>
+                      <a:round/>
+                      <a:headEnd type="none" w="med" len="med"/>
+                      <a:tailEnd type="none" w="med" len="med"/>
+                    </a:lnT>
+                    <a:lnB w="12700" cap="flat" cmpd="sng" algn="ctr">
+                      <a:solidFill>
+                        <a:schemeClr val="tx1"/>
+                      </a:solidFill>
+                      <a:prstDash val="solid"/>
+                      <a:round/>
+                      <a:headEnd type="none" w="med" len="med"/>
+                      <a:tailEnd type="none" w="med" len="med"/>
+                    </a:lnB>
+                    <a:solidFill>
+                      <a:schemeClr val="bg1">
+                        <a:lumMod val="95000"/>
+                      </a:schemeClr>
+                    </a:solidFill>
+                  </a:tcPr>
+                </a:tc>
+                <a:extLst>
+                  <a:ext uri="{0D108BD9-81ED-4DB2-BD59-A6C34878D82A}">
+                    <a16:rowId xmlns:a16="http://schemas.microsoft.com/office/drawing/2014/main" val="3617774601"/>
+                  </a:ext>
+                </a:extLst>
+              </a:tr>
+            </a:tbl>
+          </a:graphicData>
+        </a:graphic>
+      </p:graphicFrame>
+      <p:sp>
+        <p:nvSpPr>
+          <p:cNvPr id="14" name="TextBox 13">
+            <a:extLst>
+              <a:ext uri="{FF2B5EF4-FFF2-40B4-BE49-F238E27FC236}">
+                <a16:creationId xmlns:a16="http://schemas.microsoft.com/office/drawing/2014/main" id="{2F71A61A-A53A-4B60-8A25-D09FD2FD23DA}"/>
+              </a:ext>
+            </a:extLst>
+          </p:cNvPr>
+          <p:cNvSpPr txBox="1"/>
+          <p:nvPr/>
+        </p:nvSpPr>
+        <p:spPr>
+          <a:xfrm>
+            <a:off x="6284517" y="6341920"/>
+            <a:ext cx="3792583" cy="276999"/>
+          </a:xfrm>
+          <a:prstGeom prst="rect">
+            <a:avLst/>
+          </a:prstGeom>
+          <a:noFill/>
+        </p:spPr>
+        <p:txBody>
+          <a:bodyPr wrap="square" rtlCol="0">
+            <a:spAutoFit/>
+          </a:bodyPr>
+          <a:lstStyle/>
+          <a:p>
+            <a:pPr algn="ctr"/>
+            <a:r>
+              <a:rPr lang="ru-RU" sz="1200" dirty="0">
+                <a:latin typeface="Arial" panose="020B0604020202020204" pitchFamily="34" charset="0"/>
+                <a:cs typeface="Arial" panose="020B0604020202020204" pitchFamily="34" charset="0"/>
+              </a:rPr>
+              <a:t>Триггер обновления статуса объявления</a:t>
+            </a:r>
           </a:p>
         </p:txBody>
       </p:sp>
@@ -5544,7 +5903,7 @@
                 <a:latin typeface="Arial" panose="020B0604020202020204" pitchFamily="34" charset="0"/>
                 <a:cs typeface="Arial" panose="020B0604020202020204" pitchFamily="34" charset="0"/>
               </a:rPr>
-              <a:t>Node.js)</a:t>
+              <a:t>PHP)</a:t>
             </a:r>
             <a:endParaRPr lang="ru-RU" sz="2600" dirty="0">
               <a:latin typeface="Arial" panose="020B0604020202020204" pitchFamily="34" charset="0"/>
@@ -5714,7 +6073,7 @@
         <p:spPr>
           <a:xfrm>
             <a:off x="204544" y="3723774"/>
-            <a:ext cx="11776896" cy="1015663"/>
+            <a:ext cx="11776896" cy="1323439"/>
           </a:xfrm>
           <a:prstGeom prst="rect">
             <a:avLst/>
@@ -5729,18 +6088,25 @@
           <a:p>
             <a:pPr algn="ctr"/>
             <a:r>
-              <a:rPr lang="ru-RU" sz="2000" cap="all" dirty="0">
-                <a:solidFill>
-                  <a:schemeClr val="tx1">
-                    <a:lumMod val="85000"/>
-                    <a:lumOff val="15000"/>
-                  </a:schemeClr>
-                </a:solidFill>
-                <a:latin typeface="Arial" panose="020B0604020202020204" pitchFamily="34" charset="0"/>
-                <a:ea typeface="+mj-ea"/>
-                <a:cs typeface="Arial" panose="020B0604020202020204" pitchFamily="34" charset="0"/>
-              </a:rPr>
-              <a:t>Архитектура веб-приложения построена по клиент-серверной модели, где пользователь взаимодействует с интерфейсом, сервер обрабатывает запросы, а база данных обеспечивает хранение информации.</a:t>
+              <a:rPr lang="ru-RU" sz="2000" dirty="0">
+                <a:latin typeface="Arial" panose="020B0604020202020204" pitchFamily="34" charset="0"/>
+                <a:cs typeface="Arial" panose="020B0604020202020204" pitchFamily="34" charset="0"/>
+              </a:rPr>
+              <a:t>Архитектура приложения построена по клиент-серверной модели. Клиентская часть, реализованная на HTML, CSS и JavaScript, отправляет HTTP-запросы на сервер. Серверная часть на PHP обрабатывает запросы, выполняет бизнес-логику и взаимодействует с базой данных </a:t>
+            </a:r>
+            <a:r>
+              <a:rPr lang="ru-RU" sz="2000" dirty="0" err="1">
+                <a:latin typeface="Arial" panose="020B0604020202020204" pitchFamily="34" charset="0"/>
+                <a:cs typeface="Arial" panose="020B0604020202020204" pitchFamily="34" charset="0"/>
+              </a:rPr>
+              <a:t>SQLite</a:t>
+            </a:r>
+            <a:r>
+              <a:rPr lang="ru-RU" sz="2000" dirty="0">
+                <a:latin typeface="Arial" panose="020B0604020202020204" pitchFamily="34" charset="0"/>
+                <a:cs typeface="Arial" panose="020B0604020202020204" pitchFamily="34" charset="0"/>
+              </a:rPr>
+              <a:t> посредством SQL-запросов.</a:t>
             </a:r>
           </a:p>
         </p:txBody>
@@ -6025,10 +6391,10 @@
       </p:sp>
       <p:pic>
         <p:nvPicPr>
-          <p:cNvPr id="5" name="Рисунок 4">
+          <p:cNvPr id="6" name="Рисунок 5">
             <a:extLst>
               <a:ext uri="{FF2B5EF4-FFF2-40B4-BE49-F238E27FC236}">
-                <a16:creationId xmlns:a16="http://schemas.microsoft.com/office/drawing/2014/main" id="{0C9BA543-1E04-4D70-BDD4-9CE67BDE26F8}"/>
+                <a16:creationId xmlns:a16="http://schemas.microsoft.com/office/drawing/2014/main" id="{9FC5BC7F-7426-4B33-83E7-28678A9ACF61}"/>
               </a:ext>
             </a:extLst>
           </p:cNvPr>
@@ -6045,20 +6411,50 @@
         </p:blipFill>
         <p:spPr>
           <a:xfrm>
-            <a:off x="5972900" y="2425595"/>
-            <a:ext cx="5889354" cy="3296194"/>
+            <a:off x="5063619" y="1498877"/>
+            <a:ext cx="3246398" cy="3512510"/>
           </a:xfrm>
           <a:prstGeom prst="rect">
             <a:avLst/>
           </a:prstGeom>
         </p:spPr>
       </p:pic>
-      <p:sp>
-        <p:nvSpPr>
-          <p:cNvPr id="12" name="TextBox 11">
+      <p:pic>
+        <p:nvPicPr>
+          <p:cNvPr id="8" name="Рисунок 7">
             <a:extLst>
               <a:ext uri="{FF2B5EF4-FFF2-40B4-BE49-F238E27FC236}">
-                <a16:creationId xmlns:a16="http://schemas.microsoft.com/office/drawing/2014/main" id="{7235BD5D-D0F8-475A-BAA1-28937FA56D8F}"/>
+                <a16:creationId xmlns:a16="http://schemas.microsoft.com/office/drawing/2014/main" id="{2A9A5347-912A-4046-847D-B608C04E80E8}"/>
+              </a:ext>
+            </a:extLst>
+          </p:cNvPr>
+          <p:cNvPicPr>
+            <a:picLocks noChangeAspect="1"/>
+          </p:cNvPicPr>
+          <p:nvPr/>
+        </p:nvPicPr>
+        <p:blipFill>
+          <a:blip r:embed="rId3"/>
+          <a:stretch>
+            <a:fillRect/>
+          </a:stretch>
+        </p:blipFill>
+        <p:spPr>
+          <a:xfrm>
+            <a:off x="8451475" y="1498877"/>
+            <a:ext cx="3443659" cy="3512510"/>
+          </a:xfrm>
+          <a:prstGeom prst="rect">
+            <a:avLst/>
+          </a:prstGeom>
+        </p:spPr>
+      </p:pic>
+      <p:sp>
+        <p:nvSpPr>
+          <p:cNvPr id="9" name="TextBox 8">
+            <a:extLst>
+              <a:ext uri="{FF2B5EF4-FFF2-40B4-BE49-F238E27FC236}">
+                <a16:creationId xmlns:a16="http://schemas.microsoft.com/office/drawing/2014/main" id="{98096D97-3027-410C-A90E-99C1DCE820FF}"/>
               </a:ext>
             </a:extLst>
           </p:cNvPr>
@@ -6067,8 +6463,8 @@
         </p:nvSpPr>
         <p:spPr>
           <a:xfrm>
-            <a:off x="329746" y="1463040"/>
-            <a:ext cx="5269865" cy="5601533"/>
+            <a:off x="6330933" y="5021132"/>
+            <a:ext cx="1662545" cy="400110"/>
           </a:xfrm>
           <a:prstGeom prst="rect">
             <a:avLst/>
@@ -6082,7 +6478,7 @@
           <a:lstStyle/>
           <a:p>
             <a:r>
-              <a:rPr lang="ru-RU" sz="2000" dirty="0">
+              <a:rPr lang="ru-RU" sz="2000" cap="all" dirty="0">
                 <a:solidFill>
                   <a:schemeClr val="tx1">
                     <a:lumMod val="85000"/>
@@ -6093,10 +6489,41 @@
                 <a:ea typeface="+mj-ea"/>
                 <a:cs typeface="Arial" panose="020B0604020202020204" pitchFamily="34" charset="0"/>
               </a:rPr>
-              <a:t>Бэкенд реализует API для аутентификации пользователей. При входе пользователь вводит </a:t>
-            </a:r>
-            <a:r>
-              <a:rPr lang="ru-RU" sz="2000" dirty="0" err="1">
+              <a:t>вход</a:t>
+            </a:r>
+          </a:p>
+        </p:txBody>
+      </p:sp>
+      <p:sp>
+        <p:nvSpPr>
+          <p:cNvPr id="11" name="TextBox 10">
+            <a:extLst>
+              <a:ext uri="{FF2B5EF4-FFF2-40B4-BE49-F238E27FC236}">
+                <a16:creationId xmlns:a16="http://schemas.microsoft.com/office/drawing/2014/main" id="{46D43C6A-C2A7-4A5E-914C-B6777A768D1E}"/>
+              </a:ext>
+            </a:extLst>
+          </p:cNvPr>
+          <p:cNvSpPr txBox="1"/>
+          <p:nvPr/>
+        </p:nvSpPr>
+        <p:spPr>
+          <a:xfrm>
+            <a:off x="9260792" y="5021132"/>
+            <a:ext cx="2634342" cy="400110"/>
+          </a:xfrm>
+          <a:prstGeom prst="rect">
+            <a:avLst/>
+          </a:prstGeom>
+          <a:noFill/>
+        </p:spPr>
+        <p:txBody>
+          <a:bodyPr wrap="square" rtlCol="0">
+            <a:spAutoFit/>
+          </a:bodyPr>
+          <a:lstStyle/>
+          <a:p>
+            <a:r>
+              <a:rPr lang="ru-RU" sz="2000" cap="all" dirty="0">
                 <a:solidFill>
                   <a:schemeClr val="tx1">
                     <a:lumMod val="85000"/>
@@ -6107,209 +6534,444 @@
                 <a:ea typeface="+mj-ea"/>
                 <a:cs typeface="Arial" panose="020B0604020202020204" pitchFamily="34" charset="0"/>
               </a:rPr>
+              <a:t>регистрация</a:t>
+            </a:r>
+          </a:p>
+        </p:txBody>
+      </p:sp>
+      <p:sp>
+        <p:nvSpPr>
+          <p:cNvPr id="10" name="TextBox 9">
+            <a:extLst>
+              <a:ext uri="{FF2B5EF4-FFF2-40B4-BE49-F238E27FC236}">
+                <a16:creationId xmlns:a16="http://schemas.microsoft.com/office/drawing/2014/main" id="{6864EC66-D389-4523-A31F-A2E78903987F}"/>
+              </a:ext>
+            </a:extLst>
+          </p:cNvPr>
+          <p:cNvSpPr txBox="1"/>
+          <p:nvPr/>
+        </p:nvSpPr>
+        <p:spPr>
+          <a:xfrm>
+            <a:off x="155408" y="1398213"/>
+            <a:ext cx="4908211" cy="2308324"/>
+          </a:xfrm>
+          <a:prstGeom prst="rect">
+            <a:avLst/>
+          </a:prstGeom>
+          <a:noFill/>
+        </p:spPr>
+        <p:txBody>
+          <a:bodyPr wrap="square" rtlCol="0">
+            <a:spAutoFit/>
+          </a:bodyPr>
+          <a:lstStyle/>
+          <a:p>
+            <a:pPr algn="ctr">
+              <a:defRPr/>
+            </a:pPr>
+            <a:r>
+              <a:rPr lang="ru-RU" dirty="0">
+                <a:solidFill>
+                  <a:srgbClr val="000000"/>
+                </a:solidFill>
+                <a:latin typeface="Arial" panose="020B0604020202020204" pitchFamily="34" charset="0"/>
+                <a:cs typeface="Arial" panose="020B0604020202020204" pitchFamily="34" charset="0"/>
+              </a:rPr>
+              <a:t>Регистрация:</a:t>
+            </a:r>
+          </a:p>
+          <a:p>
+            <a:pPr marL="342900" indent="-342900">
+              <a:buFontTx/>
+              <a:buAutoNum type="arabicPeriod"/>
+              <a:defRPr/>
+            </a:pPr>
+            <a:r>
+              <a:rPr lang="ru-RU" dirty="0">
+                <a:solidFill>
+                  <a:srgbClr val="000000"/>
+                </a:solidFill>
+                <a:latin typeface="Arial" panose="020B0604020202020204" pitchFamily="34" charset="0"/>
+                <a:cs typeface="Arial" panose="020B0604020202020204" pitchFamily="34" charset="0"/>
+              </a:rPr>
+              <a:t>Пользователь вводит имя, телефон, </a:t>
+            </a:r>
+            <a:r>
+              <a:rPr lang="en-US" dirty="0">
+                <a:solidFill>
+                  <a:srgbClr val="000000"/>
+                </a:solidFill>
+                <a:latin typeface="Arial" panose="020B0604020202020204" pitchFamily="34" charset="0"/>
+                <a:cs typeface="Arial" panose="020B0604020202020204" pitchFamily="34" charset="0"/>
+              </a:rPr>
               <a:t>email</a:t>
             </a:r>
             <a:r>
-              <a:rPr lang="ru-RU" sz="2000" dirty="0">
-                <a:solidFill>
-                  <a:schemeClr val="tx1">
-                    <a:lumMod val="85000"/>
-                    <a:lumOff val="15000"/>
-                  </a:schemeClr>
-                </a:solidFill>
-                <a:latin typeface="Arial" panose="020B0604020202020204" pitchFamily="34" charset="0"/>
-                <a:ea typeface="+mj-ea"/>
-                <a:cs typeface="Arial" panose="020B0604020202020204" pitchFamily="34" charset="0"/>
-              </a:rPr>
-              <a:t> и пароль, которые передаются на сервер для обработки.</a:t>
-            </a:r>
-          </a:p>
-          <a:p>
-            <a:r>
-              <a:rPr lang="ru-RU" sz="2000" dirty="0">
-                <a:solidFill>
-                  <a:schemeClr val="tx1">
-                    <a:lumMod val="85000"/>
-                    <a:lumOff val="15000"/>
-                  </a:schemeClr>
-                </a:solidFill>
-                <a:latin typeface="Arial" panose="020B0604020202020204" pitchFamily="34" charset="0"/>
-                <a:ea typeface="+mj-ea"/>
-                <a:cs typeface="Arial" panose="020B0604020202020204" pitchFamily="34" charset="0"/>
-              </a:rPr>
-              <a:t>Сервер выполняет запрос к базе данных </a:t>
-            </a:r>
-            <a:r>
-              <a:rPr lang="ru-RU" sz="2000" dirty="0" err="1">
-                <a:solidFill>
-                  <a:schemeClr val="tx1">
-                    <a:lumMod val="85000"/>
-                    <a:lumOff val="15000"/>
-                  </a:schemeClr>
-                </a:solidFill>
-                <a:latin typeface="Arial" panose="020B0604020202020204" pitchFamily="34" charset="0"/>
-                <a:ea typeface="+mj-ea"/>
-                <a:cs typeface="Arial" panose="020B0604020202020204" pitchFamily="34" charset="0"/>
-              </a:rPr>
-              <a:t>SQLite</a:t>
-            </a:r>
-            <a:r>
-              <a:rPr lang="ru-RU" sz="2000" dirty="0">
-                <a:solidFill>
-                  <a:schemeClr val="tx1">
-                    <a:lumMod val="85000"/>
-                    <a:lumOff val="15000"/>
-                  </a:schemeClr>
-                </a:solidFill>
-                <a:latin typeface="Arial" panose="020B0604020202020204" pitchFamily="34" charset="0"/>
-                <a:ea typeface="+mj-ea"/>
-                <a:cs typeface="Arial" panose="020B0604020202020204" pitchFamily="34" charset="0"/>
-              </a:rPr>
-              <a:t> и проверяет наличие пользователя с указанными данными. В случае успешного совпадения система подтверждает авторизацию.</a:t>
-            </a:r>
-          </a:p>
-          <a:p>
-            <a:r>
-              <a:rPr lang="ru-RU" sz="2000" dirty="0">
-                <a:solidFill>
-                  <a:schemeClr val="tx1">
-                    <a:lumMod val="85000"/>
-                    <a:lumOff val="15000"/>
-                  </a:schemeClr>
-                </a:solidFill>
-                <a:latin typeface="Arial" panose="020B0604020202020204" pitchFamily="34" charset="0"/>
-                <a:ea typeface="+mj-ea"/>
-                <a:cs typeface="Arial" panose="020B0604020202020204" pitchFamily="34" charset="0"/>
-              </a:rPr>
-              <a:t>После входа создаётся пользовательская сессия, которая позволяет сохранять состояние пользователя и предоставлять доступ к защищённым разделам системы, включая административную панель.</a:t>
-            </a:r>
-          </a:p>
-          <a:p>
-            <a:r>
-              <a:rPr lang="ru-RU" sz="2000" dirty="0">
-                <a:solidFill>
-                  <a:schemeClr val="tx1">
-                    <a:lumMod val="85000"/>
-                    <a:lumOff val="15000"/>
-                  </a:schemeClr>
-                </a:solidFill>
-                <a:latin typeface="Arial" panose="020B0604020202020204" pitchFamily="34" charset="0"/>
-                <a:ea typeface="+mj-ea"/>
-                <a:cs typeface="Arial" panose="020B0604020202020204" pitchFamily="34" charset="0"/>
-              </a:rPr>
-              <a:t>Основные </a:t>
-            </a:r>
-            <a:r>
-              <a:rPr lang="ru-RU" sz="2000" dirty="0" err="1">
-                <a:solidFill>
-                  <a:schemeClr val="tx1">
-                    <a:lumMod val="85000"/>
-                    <a:lumOff val="15000"/>
-                  </a:schemeClr>
-                </a:solidFill>
-                <a:latin typeface="Arial" panose="020B0604020202020204" pitchFamily="34" charset="0"/>
-                <a:ea typeface="+mj-ea"/>
-                <a:cs typeface="Arial" panose="020B0604020202020204" pitchFamily="34" charset="0"/>
-              </a:rPr>
-              <a:t>эндпоинты</a:t>
-            </a:r>
-            <a:r>
-              <a:rPr lang="ru-RU" sz="2000" dirty="0">
-                <a:solidFill>
-                  <a:schemeClr val="tx1">
-                    <a:lumMod val="85000"/>
-                    <a:lumOff val="15000"/>
-                  </a:schemeClr>
-                </a:solidFill>
-                <a:latin typeface="Arial" panose="020B0604020202020204" pitchFamily="34" charset="0"/>
-                <a:ea typeface="+mj-ea"/>
-                <a:cs typeface="Arial" panose="020B0604020202020204" pitchFamily="34" charset="0"/>
-              </a:rPr>
-              <a:t>: POST /</a:t>
-            </a:r>
-            <a:r>
-              <a:rPr lang="ru-RU" sz="2000" dirty="0" err="1">
-                <a:solidFill>
-                  <a:schemeClr val="tx1">
-                    <a:lumMod val="85000"/>
-                    <a:lumOff val="15000"/>
-                  </a:schemeClr>
-                </a:solidFill>
-                <a:latin typeface="Arial" panose="020B0604020202020204" pitchFamily="34" charset="0"/>
-                <a:ea typeface="+mj-ea"/>
-                <a:cs typeface="Arial" panose="020B0604020202020204" pitchFamily="34" charset="0"/>
-              </a:rPr>
-              <a:t>login</a:t>
-            </a:r>
-            <a:r>
-              <a:rPr lang="ru-RU" sz="2000" dirty="0">
-                <a:solidFill>
-                  <a:schemeClr val="tx1">
-                    <a:lumMod val="85000"/>
-                    <a:lumOff val="15000"/>
-                  </a:schemeClr>
-                </a:solidFill>
-                <a:latin typeface="Arial" panose="020B0604020202020204" pitchFamily="34" charset="0"/>
-                <a:ea typeface="+mj-ea"/>
-                <a:cs typeface="Arial" panose="020B0604020202020204" pitchFamily="34" charset="0"/>
-              </a:rPr>
-              <a:t>, GET /</a:t>
-            </a:r>
-            <a:r>
-              <a:rPr lang="ru-RU" sz="2000" dirty="0" err="1">
-                <a:solidFill>
-                  <a:schemeClr val="tx1">
-                    <a:lumMod val="85000"/>
-                    <a:lumOff val="15000"/>
-                  </a:schemeClr>
-                </a:solidFill>
-                <a:latin typeface="Arial" panose="020B0604020202020204" pitchFamily="34" charset="0"/>
-                <a:ea typeface="+mj-ea"/>
-                <a:cs typeface="Arial" panose="020B0604020202020204" pitchFamily="34" charset="0"/>
-              </a:rPr>
-              <a:t>me</a:t>
-            </a:r>
-            <a:r>
-              <a:rPr lang="ru-RU" sz="2000" dirty="0">
-                <a:solidFill>
-                  <a:schemeClr val="tx1">
-                    <a:lumMod val="85000"/>
-                    <a:lumOff val="15000"/>
-                  </a:schemeClr>
-                </a:solidFill>
-                <a:latin typeface="Arial" panose="020B0604020202020204" pitchFamily="34" charset="0"/>
-                <a:ea typeface="+mj-ea"/>
-                <a:cs typeface="Arial" panose="020B0604020202020204" pitchFamily="34" charset="0"/>
-              </a:rPr>
-              <a:t>, POST /</a:t>
-            </a:r>
-            <a:r>
-              <a:rPr lang="ru-RU" sz="2000" dirty="0" err="1">
-                <a:solidFill>
-                  <a:schemeClr val="tx1">
-                    <a:lumMod val="85000"/>
-                    <a:lumOff val="15000"/>
-                  </a:schemeClr>
-                </a:solidFill>
-                <a:latin typeface="Arial" panose="020B0604020202020204" pitchFamily="34" charset="0"/>
-                <a:ea typeface="+mj-ea"/>
-                <a:cs typeface="Arial" panose="020B0604020202020204" pitchFamily="34" charset="0"/>
-              </a:rPr>
-              <a:t>logout</a:t>
-            </a:r>
-            <a:r>
-              <a:rPr lang="ru-RU" sz="2000" dirty="0">
-                <a:solidFill>
-                  <a:schemeClr val="tx1">
-                    <a:lumMod val="85000"/>
-                    <a:lumOff val="15000"/>
-                  </a:schemeClr>
-                </a:solidFill>
-                <a:latin typeface="Arial" panose="020B0604020202020204" pitchFamily="34" charset="0"/>
-                <a:ea typeface="+mj-ea"/>
+              <a:rPr lang="ru-RU" dirty="0">
+                <a:solidFill>
+                  <a:srgbClr val="000000"/>
+                </a:solidFill>
+                <a:latin typeface="Arial" panose="020B0604020202020204" pitchFamily="34" charset="0"/>
+                <a:cs typeface="Arial" panose="020B0604020202020204" pitchFamily="34" charset="0"/>
+              </a:rPr>
+              <a:t> и пароль.</a:t>
+            </a:r>
+          </a:p>
+          <a:p>
+            <a:pPr marL="342900" indent="-342900">
+              <a:buFontTx/>
+              <a:buAutoNum type="arabicPeriod"/>
+              <a:defRPr/>
+            </a:pPr>
+            <a:r>
+              <a:rPr lang="ru-RU" dirty="0">
+                <a:solidFill>
+                  <a:srgbClr val="000000"/>
+                </a:solidFill>
+                <a:latin typeface="Arial" panose="020B0604020202020204" pitchFamily="34" charset="0"/>
+                <a:cs typeface="Arial" panose="020B0604020202020204" pitchFamily="34" charset="0"/>
+              </a:rPr>
+              <a:t>Нажимает </a:t>
+            </a:r>
+            <a:r>
+              <a:rPr lang="en-US" dirty="0">
+                <a:solidFill>
+                  <a:srgbClr val="000000"/>
+                </a:solidFill>
+                <a:latin typeface="Arial" panose="020B0604020202020204" pitchFamily="34" charset="0"/>
+                <a:cs typeface="Arial" panose="020B0604020202020204" pitchFamily="34" charset="0"/>
+              </a:rPr>
+              <a:t>“</a:t>
+            </a:r>
+            <a:r>
+              <a:rPr lang="ru-RU" dirty="0">
+                <a:solidFill>
+                  <a:srgbClr val="000000"/>
+                </a:solidFill>
+                <a:latin typeface="Arial" panose="020B0604020202020204" pitchFamily="34" charset="0"/>
+                <a:cs typeface="Arial" panose="020B0604020202020204" pitchFamily="34" charset="0"/>
+              </a:rPr>
+              <a:t>Зарегистрироваться</a:t>
+            </a:r>
+            <a:r>
+              <a:rPr lang="en-US" dirty="0">
+                <a:solidFill>
+                  <a:srgbClr val="000000"/>
+                </a:solidFill>
+                <a:latin typeface="Arial" panose="020B0604020202020204" pitchFamily="34" charset="0"/>
+                <a:cs typeface="Arial" panose="020B0604020202020204" pitchFamily="34" charset="0"/>
+              </a:rPr>
+              <a:t>”</a:t>
+            </a:r>
+            <a:r>
+              <a:rPr lang="ru-RU" dirty="0">
+                <a:solidFill>
+                  <a:srgbClr val="000000"/>
+                </a:solidFill>
+                <a:latin typeface="Arial" panose="020B0604020202020204" pitchFamily="34" charset="0"/>
                 <a:cs typeface="Arial" panose="020B0604020202020204" pitchFamily="34" charset="0"/>
               </a:rPr>
               <a:t>.</a:t>
+            </a:r>
+          </a:p>
+          <a:p>
+            <a:pPr marL="342900" indent="-342900">
+              <a:buFontTx/>
+              <a:buAutoNum type="arabicPeriod"/>
+              <a:defRPr/>
+            </a:pPr>
+            <a:r>
+              <a:rPr lang="ru-RU" dirty="0">
+                <a:solidFill>
+                  <a:srgbClr val="000000"/>
+                </a:solidFill>
+                <a:latin typeface="Arial" panose="020B0604020202020204" pitchFamily="34" charset="0"/>
+                <a:cs typeface="Arial" panose="020B0604020202020204" pitchFamily="34" charset="0"/>
+              </a:rPr>
+              <a:t>Система проверяет уникальность </a:t>
+            </a:r>
+            <a:r>
+              <a:rPr lang="en-US" dirty="0">
+                <a:solidFill>
+                  <a:srgbClr val="000000"/>
+                </a:solidFill>
+                <a:latin typeface="Arial" panose="020B0604020202020204" pitchFamily="34" charset="0"/>
+                <a:cs typeface="Arial" panose="020B0604020202020204" pitchFamily="34" charset="0"/>
+              </a:rPr>
+              <a:t>email</a:t>
+            </a:r>
+            <a:r>
+              <a:rPr lang="ru-RU" dirty="0">
+                <a:solidFill>
+                  <a:srgbClr val="000000"/>
+                </a:solidFill>
+                <a:latin typeface="Arial" panose="020B0604020202020204" pitchFamily="34" charset="0"/>
+                <a:cs typeface="Arial" panose="020B0604020202020204" pitchFamily="34" charset="0"/>
+              </a:rPr>
+              <a:t>.</a:t>
+            </a:r>
+          </a:p>
+          <a:p>
+            <a:pPr marL="342900" indent="-342900">
+              <a:buFontTx/>
+              <a:buAutoNum type="arabicPeriod"/>
+              <a:defRPr/>
+            </a:pPr>
+            <a:r>
+              <a:rPr lang="ru-RU" dirty="0">
+                <a:solidFill>
+                  <a:srgbClr val="000000"/>
+                </a:solidFill>
+                <a:latin typeface="Arial" panose="020B0604020202020204" pitchFamily="34" charset="0"/>
+                <a:cs typeface="Arial" panose="020B0604020202020204" pitchFamily="34" charset="0"/>
+              </a:rPr>
+              <a:t>Пароль </a:t>
+            </a:r>
+            <a:r>
+              <a:rPr lang="ru-RU" dirty="0" err="1">
+                <a:solidFill>
+                  <a:srgbClr val="000000"/>
+                </a:solidFill>
+                <a:latin typeface="Arial" panose="020B0604020202020204" pitchFamily="34" charset="0"/>
+                <a:cs typeface="Arial" panose="020B0604020202020204" pitchFamily="34" charset="0"/>
+              </a:rPr>
+              <a:t>хешируется</a:t>
+            </a:r>
+            <a:r>
+              <a:rPr lang="ru-RU" dirty="0">
+                <a:solidFill>
+                  <a:srgbClr val="000000"/>
+                </a:solidFill>
+                <a:latin typeface="Arial" panose="020B0604020202020204" pitchFamily="34" charset="0"/>
+                <a:cs typeface="Arial" panose="020B0604020202020204" pitchFamily="34" charset="0"/>
+              </a:rPr>
+              <a:t> и данные сохраняются в БД.</a:t>
+            </a:r>
+          </a:p>
+          <a:p>
+            <a:endParaRPr lang="ru-RU" dirty="0"/>
+          </a:p>
+        </p:txBody>
+      </p:sp>
+      <p:sp>
+        <p:nvSpPr>
+          <p:cNvPr id="13" name="TextBox 12">
+            <a:extLst>
+              <a:ext uri="{FF2B5EF4-FFF2-40B4-BE49-F238E27FC236}">
+                <a16:creationId xmlns:a16="http://schemas.microsoft.com/office/drawing/2014/main" id="{837F8067-9CE4-420A-A164-2E2E9D55FCB0}"/>
+              </a:ext>
+            </a:extLst>
+          </p:cNvPr>
+          <p:cNvSpPr txBox="1"/>
+          <p:nvPr/>
+        </p:nvSpPr>
+        <p:spPr>
+          <a:xfrm>
+            <a:off x="84679" y="3701183"/>
+            <a:ext cx="4978940" cy="2308324"/>
+          </a:xfrm>
+          <a:prstGeom prst="rect">
+            <a:avLst/>
+          </a:prstGeom>
+          <a:noFill/>
+        </p:spPr>
+        <p:txBody>
+          <a:bodyPr wrap="square" rtlCol="0">
+            <a:spAutoFit/>
+          </a:bodyPr>
+          <a:lstStyle/>
+          <a:p>
+            <a:pPr algn="ctr">
+              <a:defRPr/>
+            </a:pPr>
+            <a:r>
+              <a:rPr lang="ru-RU" dirty="0">
+                <a:solidFill>
+                  <a:srgbClr val="000000"/>
+                </a:solidFill>
+                <a:latin typeface="Arial" panose="020B0604020202020204" pitchFamily="34" charset="0"/>
+                <a:cs typeface="Arial" panose="020B0604020202020204" pitchFamily="34" charset="0"/>
+              </a:rPr>
+              <a:t>Вход:</a:t>
+            </a:r>
+          </a:p>
+          <a:p>
+            <a:pPr marL="342900" indent="-342900">
+              <a:buFontTx/>
+              <a:buAutoNum type="arabicPeriod"/>
+              <a:defRPr/>
+            </a:pPr>
+            <a:r>
+              <a:rPr lang="ru-RU" dirty="0">
+                <a:solidFill>
+                  <a:srgbClr val="000000"/>
+                </a:solidFill>
+                <a:latin typeface="Arial" panose="020B0604020202020204" pitchFamily="34" charset="0"/>
+                <a:cs typeface="Arial" panose="020B0604020202020204" pitchFamily="34" charset="0"/>
+              </a:rPr>
+              <a:t>Пользователь вводит </a:t>
+            </a:r>
+            <a:r>
+              <a:rPr lang="en-US" dirty="0">
+                <a:solidFill>
+                  <a:srgbClr val="000000"/>
+                </a:solidFill>
+                <a:latin typeface="Arial" panose="020B0604020202020204" pitchFamily="34" charset="0"/>
+                <a:cs typeface="Arial" panose="020B0604020202020204" pitchFamily="34" charset="0"/>
+              </a:rPr>
+              <a:t>email </a:t>
+            </a:r>
+            <a:r>
+              <a:rPr lang="ru-RU" dirty="0">
+                <a:solidFill>
+                  <a:srgbClr val="000000"/>
+                </a:solidFill>
+                <a:latin typeface="Arial" panose="020B0604020202020204" pitchFamily="34" charset="0"/>
+                <a:cs typeface="Arial" panose="020B0604020202020204" pitchFamily="34" charset="0"/>
+              </a:rPr>
+              <a:t>и пароль.</a:t>
+            </a:r>
+          </a:p>
+          <a:p>
+            <a:pPr marL="342900" indent="-342900">
+              <a:buFontTx/>
+              <a:buAutoNum type="arabicPeriod"/>
+              <a:defRPr/>
+            </a:pPr>
+            <a:r>
+              <a:rPr lang="ru-RU" dirty="0">
+                <a:solidFill>
+                  <a:srgbClr val="000000"/>
+                </a:solidFill>
+                <a:latin typeface="Arial" panose="020B0604020202020204" pitchFamily="34" charset="0"/>
+                <a:cs typeface="Arial" panose="020B0604020202020204" pitchFamily="34" charset="0"/>
+              </a:rPr>
+              <a:t>Нажимает </a:t>
+            </a:r>
+            <a:r>
+              <a:rPr lang="en-US" dirty="0">
+                <a:solidFill>
+                  <a:srgbClr val="000000"/>
+                </a:solidFill>
+                <a:latin typeface="Arial" panose="020B0604020202020204" pitchFamily="34" charset="0"/>
+                <a:cs typeface="Arial" panose="020B0604020202020204" pitchFamily="34" charset="0"/>
+              </a:rPr>
+              <a:t>“</a:t>
+            </a:r>
+            <a:r>
+              <a:rPr lang="ru-RU" dirty="0">
+                <a:solidFill>
+                  <a:srgbClr val="000000"/>
+                </a:solidFill>
+                <a:latin typeface="Arial" panose="020B0604020202020204" pitchFamily="34" charset="0"/>
+                <a:cs typeface="Arial" panose="020B0604020202020204" pitchFamily="34" charset="0"/>
+              </a:rPr>
+              <a:t>Войти</a:t>
+            </a:r>
+            <a:r>
+              <a:rPr lang="en-US" dirty="0">
+                <a:solidFill>
+                  <a:srgbClr val="000000"/>
+                </a:solidFill>
+                <a:latin typeface="Arial" panose="020B0604020202020204" pitchFamily="34" charset="0"/>
+                <a:cs typeface="Arial" panose="020B0604020202020204" pitchFamily="34" charset="0"/>
+              </a:rPr>
+              <a:t>”</a:t>
+            </a:r>
+            <a:r>
+              <a:rPr lang="ru-RU" dirty="0">
+                <a:solidFill>
+                  <a:srgbClr val="000000"/>
+                </a:solidFill>
+                <a:latin typeface="Arial" panose="020B0604020202020204" pitchFamily="34" charset="0"/>
+                <a:cs typeface="Arial" panose="020B0604020202020204" pitchFamily="34" charset="0"/>
+              </a:rPr>
+              <a:t>.</a:t>
+            </a:r>
+          </a:p>
+          <a:p>
+            <a:pPr marL="342900" indent="-342900">
+              <a:buFontTx/>
+              <a:buAutoNum type="arabicPeriod"/>
+              <a:defRPr/>
+            </a:pPr>
+            <a:r>
+              <a:rPr lang="ru-RU" dirty="0">
+                <a:solidFill>
+                  <a:srgbClr val="000000"/>
+                </a:solidFill>
+                <a:latin typeface="Arial" panose="020B0604020202020204" pitchFamily="34" charset="0"/>
+                <a:cs typeface="Arial" panose="020B0604020202020204" pitchFamily="34" charset="0"/>
+              </a:rPr>
+              <a:t>Система находит пользователя по </a:t>
+            </a:r>
+            <a:r>
+              <a:rPr lang="en-US" dirty="0">
+                <a:solidFill>
+                  <a:srgbClr val="000000"/>
+                </a:solidFill>
+                <a:latin typeface="Arial" panose="020B0604020202020204" pitchFamily="34" charset="0"/>
+                <a:cs typeface="Arial" panose="020B0604020202020204" pitchFamily="34" charset="0"/>
+              </a:rPr>
+              <a:t>email</a:t>
+            </a:r>
+            <a:r>
+              <a:rPr lang="ru-RU" dirty="0">
+                <a:solidFill>
+                  <a:srgbClr val="000000"/>
+                </a:solidFill>
+                <a:latin typeface="Arial" panose="020B0604020202020204" pitchFamily="34" charset="0"/>
+                <a:cs typeface="Arial" panose="020B0604020202020204" pitchFamily="34" charset="0"/>
+              </a:rPr>
+              <a:t> и сверяет пароль через </a:t>
+            </a:r>
+            <a:r>
+              <a:rPr lang="en-US" dirty="0" err="1">
+                <a:solidFill>
+                  <a:srgbClr val="000000"/>
+                </a:solidFill>
+                <a:latin typeface="Arial" panose="020B0604020202020204" pitchFamily="34" charset="0"/>
+                <a:cs typeface="Arial" panose="020B0604020202020204" pitchFamily="34" charset="0"/>
+              </a:rPr>
+              <a:t>password_verify</a:t>
+            </a:r>
+            <a:r>
+              <a:rPr lang="en-US" dirty="0">
+                <a:solidFill>
+                  <a:srgbClr val="000000"/>
+                </a:solidFill>
+                <a:latin typeface="Arial" panose="020B0604020202020204" pitchFamily="34" charset="0"/>
+                <a:cs typeface="Arial" panose="020B0604020202020204" pitchFamily="34" charset="0"/>
+              </a:rPr>
+              <a:t>()</a:t>
+            </a:r>
+            <a:r>
+              <a:rPr lang="ru-RU" dirty="0">
+                <a:solidFill>
+                  <a:srgbClr val="000000"/>
+                </a:solidFill>
+                <a:latin typeface="Arial" panose="020B0604020202020204" pitchFamily="34" charset="0"/>
+                <a:cs typeface="Arial" panose="020B0604020202020204" pitchFamily="34" charset="0"/>
+              </a:rPr>
+              <a:t>.</a:t>
+            </a:r>
+          </a:p>
+          <a:p>
+            <a:pPr marL="342900" indent="-342900">
+              <a:buFontTx/>
+              <a:buAutoNum type="arabicPeriod"/>
+              <a:defRPr/>
+            </a:pPr>
+            <a:r>
+              <a:rPr lang="ru-RU" dirty="0">
+                <a:solidFill>
+                  <a:srgbClr val="000000"/>
+                </a:solidFill>
+                <a:latin typeface="Arial" panose="020B0604020202020204" pitchFamily="34" charset="0"/>
+                <a:cs typeface="Arial" panose="020B0604020202020204" pitchFamily="34" charset="0"/>
+              </a:rPr>
+              <a:t>При успешной проверке создаётся сессия и открывается личный кабинет.</a:t>
             </a:r>
           </a:p>
           <a:p>
@@ -6490,12 +7152,168 @@
           </a:p>
         </p:txBody>
       </p:sp>
+      <p:sp>
+        <p:nvSpPr>
+          <p:cNvPr id="13" name="TextBox 12">
+            <a:extLst>
+              <a:ext uri="{FF2B5EF4-FFF2-40B4-BE49-F238E27FC236}">
+                <a16:creationId xmlns:a16="http://schemas.microsoft.com/office/drawing/2014/main" id="{459F28CE-2EA7-4249-B28C-418215F8C676}"/>
+              </a:ext>
+            </a:extLst>
+          </p:cNvPr>
+          <p:cNvSpPr txBox="1"/>
+          <p:nvPr/>
+        </p:nvSpPr>
+        <p:spPr>
+          <a:xfrm>
+            <a:off x="1851030" y="3688577"/>
+            <a:ext cx="2003258" cy="276999"/>
+          </a:xfrm>
+          <a:prstGeom prst="rect">
+            <a:avLst/>
+          </a:prstGeom>
+          <a:noFill/>
+        </p:spPr>
+        <p:txBody>
+          <a:bodyPr wrap="square" rtlCol="0">
+            <a:spAutoFit/>
+          </a:bodyPr>
+          <a:lstStyle/>
+          <a:p>
+            <a:pPr algn="ctr"/>
+            <a:r>
+              <a:rPr lang="ru-RU" sz="1200" dirty="0">
+                <a:latin typeface="Arial" panose="020B0604020202020204" pitchFamily="34" charset="0"/>
+                <a:cs typeface="Arial" panose="020B0604020202020204" pitchFamily="34" charset="0"/>
+              </a:rPr>
+              <a:t>Главная страница</a:t>
+            </a:r>
+          </a:p>
+        </p:txBody>
+      </p:sp>
+      <p:sp>
+        <p:nvSpPr>
+          <p:cNvPr id="14" name="TextBox 13">
+            <a:extLst>
+              <a:ext uri="{FF2B5EF4-FFF2-40B4-BE49-F238E27FC236}">
+                <a16:creationId xmlns:a16="http://schemas.microsoft.com/office/drawing/2014/main" id="{F314E0EB-E582-4DF6-B45D-761ACBCD48F1}"/>
+              </a:ext>
+            </a:extLst>
+          </p:cNvPr>
+          <p:cNvSpPr txBox="1"/>
+          <p:nvPr/>
+        </p:nvSpPr>
+        <p:spPr>
+          <a:xfrm>
+            <a:off x="1881940" y="6278212"/>
+            <a:ext cx="2003258" cy="276999"/>
+          </a:xfrm>
+          <a:prstGeom prst="rect">
+            <a:avLst/>
+          </a:prstGeom>
+          <a:noFill/>
+        </p:spPr>
+        <p:txBody>
+          <a:bodyPr wrap="square" rtlCol="0">
+            <a:spAutoFit/>
+          </a:bodyPr>
+          <a:lstStyle/>
+          <a:p>
+            <a:pPr algn="ctr"/>
+            <a:r>
+              <a:rPr lang="ru-RU" sz="1200" dirty="0">
+                <a:latin typeface="Arial" panose="020B0604020202020204" pitchFamily="34" charset="0"/>
+                <a:cs typeface="Arial" panose="020B0604020202020204" pitchFamily="34" charset="0"/>
+              </a:rPr>
+              <a:t>Личный кабинет</a:t>
+            </a:r>
+          </a:p>
+        </p:txBody>
+      </p:sp>
+      <p:sp>
+        <p:nvSpPr>
+          <p:cNvPr id="15" name="TextBox 14">
+            <a:extLst>
+              <a:ext uri="{FF2B5EF4-FFF2-40B4-BE49-F238E27FC236}">
+                <a16:creationId xmlns:a16="http://schemas.microsoft.com/office/drawing/2014/main" id="{D138D638-4006-43F0-93CA-94225EBDE257}"/>
+              </a:ext>
+            </a:extLst>
+          </p:cNvPr>
+          <p:cNvSpPr txBox="1"/>
+          <p:nvPr/>
+        </p:nvSpPr>
+        <p:spPr>
+          <a:xfrm>
+            <a:off x="8391684" y="3688577"/>
+            <a:ext cx="2003258" cy="276999"/>
+          </a:xfrm>
+          <a:prstGeom prst="rect">
+            <a:avLst/>
+          </a:prstGeom>
+          <a:noFill/>
+        </p:spPr>
+        <p:txBody>
+          <a:bodyPr wrap="square" rtlCol="0">
+            <a:spAutoFit/>
+          </a:bodyPr>
+          <a:lstStyle/>
+          <a:p>
+            <a:pPr algn="ctr"/>
+            <a:r>
+              <a:rPr lang="ru-RU" sz="1200" dirty="0">
+                <a:latin typeface="Arial" panose="020B0604020202020204" pitchFamily="34" charset="0"/>
+                <a:cs typeface="Arial" panose="020B0604020202020204" pitchFamily="34" charset="0"/>
+              </a:rPr>
+              <a:t>Форма регистрации</a:t>
+            </a:r>
+          </a:p>
+        </p:txBody>
+      </p:sp>
+      <p:sp>
+        <p:nvSpPr>
+          <p:cNvPr id="16" name="TextBox 15">
+            <a:extLst>
+              <a:ext uri="{FF2B5EF4-FFF2-40B4-BE49-F238E27FC236}">
+                <a16:creationId xmlns:a16="http://schemas.microsoft.com/office/drawing/2014/main" id="{2D9010DA-14A0-4185-A0FF-224AFADF25F7}"/>
+              </a:ext>
+            </a:extLst>
+          </p:cNvPr>
+          <p:cNvSpPr txBox="1"/>
+          <p:nvPr/>
+        </p:nvSpPr>
+        <p:spPr>
+          <a:xfrm>
+            <a:off x="8337712" y="6278213"/>
+            <a:ext cx="2003258" cy="276999"/>
+          </a:xfrm>
+          <a:prstGeom prst="rect">
+            <a:avLst/>
+          </a:prstGeom>
+          <a:noFill/>
+        </p:spPr>
+        <p:txBody>
+          <a:bodyPr wrap="square" rtlCol="0">
+            <a:spAutoFit/>
+          </a:bodyPr>
+          <a:lstStyle/>
+          <a:p>
+            <a:pPr algn="ctr"/>
+            <a:r>
+              <a:rPr lang="ru-RU" sz="1200" dirty="0">
+                <a:latin typeface="Arial" panose="020B0604020202020204" pitchFamily="34" charset="0"/>
+                <a:cs typeface="Arial" panose="020B0604020202020204" pitchFamily="34" charset="0"/>
+              </a:rPr>
+              <a:t>Форма входа</a:t>
+            </a:r>
+          </a:p>
+        </p:txBody>
+      </p:sp>
       <p:pic>
         <p:nvPicPr>
-          <p:cNvPr id="6" name="Рисунок 5">
+          <p:cNvPr id="5" name="Рисунок 4">
             <a:extLst>
               <a:ext uri="{FF2B5EF4-FFF2-40B4-BE49-F238E27FC236}">
-                <a16:creationId xmlns:a16="http://schemas.microsoft.com/office/drawing/2014/main" id="{8259D6BE-3206-42C1-9594-D9516362A844}"/>
+                <a16:creationId xmlns:a16="http://schemas.microsoft.com/office/drawing/2014/main" id="{2E5F7DFA-24B6-4D69-8B1B-7632696AD085}"/>
               </a:ext>
             </a:extLst>
           </p:cNvPr>
@@ -6512,8 +7330,8 @@
         </p:blipFill>
         <p:spPr>
           <a:xfrm>
-            <a:off x="1127303" y="1586323"/>
-            <a:ext cx="3450712" cy="2155479"/>
+            <a:off x="1127302" y="1544162"/>
+            <a:ext cx="3450712" cy="2197640"/>
           </a:xfrm>
           <a:prstGeom prst="rect">
             <a:avLst/>
@@ -6522,10 +7340,10 @@
       </p:pic>
       <p:pic>
         <p:nvPicPr>
-          <p:cNvPr id="8" name="Рисунок 7">
+          <p:cNvPr id="9" name="Рисунок 8">
             <a:extLst>
               <a:ext uri="{FF2B5EF4-FFF2-40B4-BE49-F238E27FC236}">
-                <a16:creationId xmlns:a16="http://schemas.microsoft.com/office/drawing/2014/main" id="{23D4E7C8-13D3-4AA4-A018-4D1430F10D2D}"/>
+                <a16:creationId xmlns:a16="http://schemas.microsoft.com/office/drawing/2014/main" id="{2996D9C6-39C8-4820-8C2C-8EF386FFB6C3}"/>
               </a:ext>
             </a:extLst>
           </p:cNvPr>
@@ -6542,8 +7360,8 @@
         </p:blipFill>
         <p:spPr>
           <a:xfrm>
-            <a:off x="1127304" y="4175960"/>
-            <a:ext cx="3450712" cy="2155479"/>
+            <a:off x="7613984" y="4175960"/>
+            <a:ext cx="3450712" cy="2138545"/>
           </a:xfrm>
           <a:prstGeom prst="rect">
             <a:avLst/>
@@ -6552,10 +7370,10 @@
       </p:pic>
       <p:pic>
         <p:nvPicPr>
-          <p:cNvPr id="10" name="Рисунок 9">
+          <p:cNvPr id="17" name="Рисунок 16">
             <a:extLst>
               <a:ext uri="{FF2B5EF4-FFF2-40B4-BE49-F238E27FC236}">
-                <a16:creationId xmlns:a16="http://schemas.microsoft.com/office/drawing/2014/main" id="{F3B91248-2CA1-4702-9306-CFB134E35E6A}"/>
+                <a16:creationId xmlns:a16="http://schemas.microsoft.com/office/drawing/2014/main" id="{9C611A81-F2A7-4A15-91AC-C49C004CEA9A}"/>
               </a:ext>
             </a:extLst>
           </p:cNvPr>
@@ -6572,8 +7390,8 @@
         </p:blipFill>
         <p:spPr>
           <a:xfrm>
-            <a:off x="7613985" y="4181599"/>
-            <a:ext cx="3450712" cy="2149840"/>
+            <a:off x="7613984" y="1573709"/>
+            <a:ext cx="3450712" cy="2138546"/>
           </a:xfrm>
           <a:prstGeom prst="rect">
             <a:avLst/>
@@ -6582,10 +7400,10 @@
       </p:pic>
       <p:pic>
         <p:nvPicPr>
-          <p:cNvPr id="12" name="Рисунок 11">
+          <p:cNvPr id="21" name="Рисунок 20">
             <a:extLst>
               <a:ext uri="{FF2B5EF4-FFF2-40B4-BE49-F238E27FC236}">
-                <a16:creationId xmlns:a16="http://schemas.microsoft.com/office/drawing/2014/main" id="{B10E9A36-2884-4043-8D57-7EAAC62D69E1}"/>
+                <a16:creationId xmlns:a16="http://schemas.microsoft.com/office/drawing/2014/main" id="{C691C3A2-FCA6-4687-9DCE-24C6A36DDEA9}"/>
               </a:ext>
             </a:extLst>
           </p:cNvPr>
@@ -6602,170 +7420,14 @@
         </p:blipFill>
         <p:spPr>
           <a:xfrm>
-            <a:off x="7613986" y="1591962"/>
-            <a:ext cx="3450712" cy="2149840"/>
+            <a:off x="1127302" y="4146413"/>
+            <a:ext cx="3450712" cy="2168092"/>
           </a:xfrm>
           <a:prstGeom prst="rect">
             <a:avLst/>
           </a:prstGeom>
         </p:spPr>
       </p:pic>
-      <p:sp>
-        <p:nvSpPr>
-          <p:cNvPr id="13" name="TextBox 12">
-            <a:extLst>
-              <a:ext uri="{FF2B5EF4-FFF2-40B4-BE49-F238E27FC236}">
-                <a16:creationId xmlns:a16="http://schemas.microsoft.com/office/drawing/2014/main" id="{459F28CE-2EA7-4249-B28C-418215F8C676}"/>
-              </a:ext>
-            </a:extLst>
-          </p:cNvPr>
-          <p:cNvSpPr txBox="1"/>
-          <p:nvPr/>
-        </p:nvSpPr>
-        <p:spPr>
-          <a:xfrm>
-            <a:off x="1851030" y="3651103"/>
-            <a:ext cx="2003258" cy="276999"/>
-          </a:xfrm>
-          <a:prstGeom prst="rect">
-            <a:avLst/>
-          </a:prstGeom>
-          <a:noFill/>
-        </p:spPr>
-        <p:txBody>
-          <a:bodyPr wrap="square" rtlCol="0">
-            <a:spAutoFit/>
-          </a:bodyPr>
-          <a:lstStyle/>
-          <a:p>
-            <a:pPr algn="ctr"/>
-            <a:r>
-              <a:rPr lang="ru-RU" sz="1200" dirty="0">
-                <a:latin typeface="Arial" panose="020B0604020202020204" pitchFamily="34" charset="0"/>
-                <a:cs typeface="Arial" panose="020B0604020202020204" pitchFamily="34" charset="0"/>
-              </a:rPr>
-              <a:t>Главная страница</a:t>
-            </a:r>
-          </a:p>
-        </p:txBody>
-      </p:sp>
-      <p:sp>
-        <p:nvSpPr>
-          <p:cNvPr id="14" name="TextBox 13">
-            <a:extLst>
-              <a:ext uri="{FF2B5EF4-FFF2-40B4-BE49-F238E27FC236}">
-                <a16:creationId xmlns:a16="http://schemas.microsoft.com/office/drawing/2014/main" id="{F314E0EB-E582-4DF6-B45D-761ACBCD48F1}"/>
-              </a:ext>
-            </a:extLst>
-          </p:cNvPr>
-          <p:cNvSpPr txBox="1"/>
-          <p:nvPr/>
-        </p:nvSpPr>
-        <p:spPr>
-          <a:xfrm>
-            <a:off x="1851030" y="6278214"/>
-            <a:ext cx="2003258" cy="276999"/>
-          </a:xfrm>
-          <a:prstGeom prst="rect">
-            <a:avLst/>
-          </a:prstGeom>
-          <a:noFill/>
-        </p:spPr>
-        <p:txBody>
-          <a:bodyPr wrap="square" rtlCol="0">
-            <a:spAutoFit/>
-          </a:bodyPr>
-          <a:lstStyle/>
-          <a:p>
-            <a:pPr algn="ctr"/>
-            <a:r>
-              <a:rPr lang="ru-RU" sz="1200" dirty="0">
-                <a:latin typeface="Arial" panose="020B0604020202020204" pitchFamily="34" charset="0"/>
-                <a:cs typeface="Arial" panose="020B0604020202020204" pitchFamily="34" charset="0"/>
-              </a:rPr>
-              <a:t>Окно подачи заявки</a:t>
-            </a:r>
-          </a:p>
-        </p:txBody>
-      </p:sp>
-      <p:sp>
-        <p:nvSpPr>
-          <p:cNvPr id="15" name="TextBox 14">
-            <a:extLst>
-              <a:ext uri="{FF2B5EF4-FFF2-40B4-BE49-F238E27FC236}">
-                <a16:creationId xmlns:a16="http://schemas.microsoft.com/office/drawing/2014/main" id="{D138D638-4006-43F0-93CA-94225EBDE257}"/>
-              </a:ext>
-            </a:extLst>
-          </p:cNvPr>
-          <p:cNvSpPr txBox="1"/>
-          <p:nvPr/>
-        </p:nvSpPr>
-        <p:spPr>
-          <a:xfrm>
-            <a:off x="8391684" y="3688577"/>
-            <a:ext cx="2003258" cy="276999"/>
-          </a:xfrm>
-          <a:prstGeom prst="rect">
-            <a:avLst/>
-          </a:prstGeom>
-          <a:noFill/>
-        </p:spPr>
-        <p:txBody>
-          <a:bodyPr wrap="square" rtlCol="0">
-            <a:spAutoFit/>
-          </a:bodyPr>
-          <a:lstStyle/>
-          <a:p>
-            <a:pPr algn="ctr"/>
-            <a:r>
-              <a:rPr lang="ru-RU" sz="1200" dirty="0">
-                <a:latin typeface="Arial" panose="020B0604020202020204" pitchFamily="34" charset="0"/>
-                <a:cs typeface="Arial" panose="020B0604020202020204" pitchFamily="34" charset="0"/>
-              </a:rPr>
-              <a:t>Форма регистрации</a:t>
-            </a:r>
-          </a:p>
-        </p:txBody>
-      </p:sp>
-      <p:sp>
-        <p:nvSpPr>
-          <p:cNvPr id="16" name="TextBox 15">
-            <a:extLst>
-              <a:ext uri="{FF2B5EF4-FFF2-40B4-BE49-F238E27FC236}">
-                <a16:creationId xmlns:a16="http://schemas.microsoft.com/office/drawing/2014/main" id="{2D9010DA-14A0-4185-A0FF-224AFADF25F7}"/>
-              </a:ext>
-            </a:extLst>
-          </p:cNvPr>
-          <p:cNvSpPr txBox="1"/>
-          <p:nvPr/>
-        </p:nvSpPr>
-        <p:spPr>
-          <a:xfrm>
-            <a:off x="8337712" y="6278213"/>
-            <a:ext cx="2003258" cy="276999"/>
-          </a:xfrm>
-          <a:prstGeom prst="rect">
-            <a:avLst/>
-          </a:prstGeom>
-          <a:noFill/>
-        </p:spPr>
-        <p:txBody>
-          <a:bodyPr wrap="square" rtlCol="0">
-            <a:spAutoFit/>
-          </a:bodyPr>
-          <a:lstStyle/>
-          <a:p>
-            <a:pPr algn="ctr"/>
-            <a:r>
-              <a:rPr lang="ru-RU" sz="1200" dirty="0">
-                <a:latin typeface="Arial" panose="020B0604020202020204" pitchFamily="34" charset="0"/>
-                <a:cs typeface="Arial" panose="020B0604020202020204" pitchFamily="34" charset="0"/>
-              </a:rPr>
-              <a:t>Форма входа</a:t>
-            </a:r>
-          </a:p>
-        </p:txBody>
-      </p:sp>
     </p:spTree>
     <p:extLst>
       <p:ext uri="{BB962C8B-B14F-4D97-AF65-F5344CB8AC3E}">
@@ -6951,14 +7613,14 @@
           <p:nvPr>
             <p:extLst>
               <p:ext uri="{D42A27DB-BD31-4B8C-83A1-F6EECF244321}">
-                <p14:modId xmlns:p14="http://schemas.microsoft.com/office/powerpoint/2010/main" val="3838265725"/>
+                <p14:modId xmlns:p14="http://schemas.microsoft.com/office/powerpoint/2010/main" val="2941980315"/>
               </p:ext>
             </p:extLst>
           </p:nvPr>
         </p:nvGraphicFramePr>
         <p:xfrm>
           <a:off x="300800" y="1522776"/>
-          <a:ext cx="5558980" cy="2225039"/>
+          <a:ext cx="5558980" cy="2529840"/>
         </p:xfrm>
         <a:graphic>
           <a:graphicData uri="http://schemas.openxmlformats.org/drawingml/2006/table">
@@ -7016,7 +7678,7 @@
                           <a:latin typeface="Arial" panose="020B0604020202020204" pitchFamily="34" charset="0"/>
                           <a:cs typeface="Arial" panose="020B0604020202020204" pitchFamily="34" charset="0"/>
                         </a:rPr>
-                        <a:t>– </a:t>
+                        <a:t>–</a:t>
                       </a:r>
                       <a:r>
                         <a:rPr lang="ru-RU" sz="2000" b="0" dirty="0">
@@ -7026,7 +7688,7 @@
                           <a:latin typeface="Arial" panose="020B0604020202020204" pitchFamily="34" charset="0"/>
                           <a:cs typeface="Arial" panose="020B0604020202020204" pitchFamily="34" charset="0"/>
                         </a:rPr>
-                        <a:t>просмотр объектов и бронирование</a:t>
+                        <a:t> просмотр объявлений, подача заявок, избранное, личный кабинет, чат с администратором.</a:t>
                       </a:r>
                     </a:p>
                     <a:p>
@@ -7042,67 +7704,49 @@
                           <a:latin typeface="Arial" panose="020B0604020202020204" pitchFamily="34" charset="0"/>
                           <a:cs typeface="Arial" panose="020B0604020202020204" pitchFamily="34" charset="0"/>
                         </a:rPr>
-                        <a:t>Арендодатель – добавление и управление объектами</a:t>
-                      </a:r>
-                    </a:p>
-                    <a:p>
-                      <a:pPr marL="285750" indent="-285750">
-                        <a:buFont typeface="Arial" panose="020B0604020202020204" pitchFamily="34" charset="0"/>
-                        <a:buChar char="•"/>
-                      </a:pPr>
-                      <a:r>
-                        <a:rPr lang="ru-RU" sz="2000" b="0" dirty="0">
-                          <a:solidFill>
-                            <a:schemeClr val="tx1"/>
-                          </a:solidFill>
-                          <a:latin typeface="Arial" panose="020B0604020202020204" pitchFamily="34" charset="0"/>
-                          <a:cs typeface="Arial" panose="020B0604020202020204" pitchFamily="34" charset="0"/>
-                        </a:rPr>
-                        <a:t>Администратор – полный доступ к системе</a:t>
+                        <a:t>Администратор – полный доступ к системе, добавление и управление объектами, обработка заявок, чат с пользователем.</a:t>
                       </a:r>
                     </a:p>
                   </a:txBody>
                   <a:tcPr>
                     <a:lnL w="12700" cap="flat" cmpd="sng" algn="ctr">
-                      <a:solidFill>
-                        <a:schemeClr val="tx1"/>
-                      </a:solidFill>
+                      <a:noFill/>
                       <a:prstDash val="solid"/>
                       <a:round/>
                       <a:headEnd type="none" w="med" len="med"/>
                       <a:tailEnd type="none" w="med" len="med"/>
                     </a:lnL>
                     <a:lnR w="12700" cap="flat" cmpd="sng" algn="ctr">
-                      <a:solidFill>
-                        <a:schemeClr val="tx1"/>
-                      </a:solidFill>
+                      <a:noFill/>
                       <a:prstDash val="solid"/>
                       <a:round/>
                       <a:headEnd type="none" w="med" len="med"/>
                       <a:tailEnd type="none" w="med" len="med"/>
                     </a:lnR>
                     <a:lnT w="12700" cap="flat" cmpd="sng" algn="ctr">
-                      <a:solidFill>
-                        <a:schemeClr val="tx1"/>
-                      </a:solidFill>
+                      <a:noFill/>
                       <a:prstDash val="solid"/>
                       <a:round/>
                       <a:headEnd type="none" w="med" len="med"/>
                       <a:tailEnd type="none" w="med" len="med"/>
                     </a:lnT>
                     <a:lnB w="12700" cap="flat" cmpd="sng" algn="ctr">
-                      <a:solidFill>
-                        <a:schemeClr val="tx1"/>
-                      </a:solidFill>
+                      <a:noFill/>
                       <a:prstDash val="solid"/>
                       <a:round/>
                       <a:headEnd type="none" w="med" len="med"/>
                       <a:tailEnd type="none" w="med" len="med"/>
                     </a:lnB>
+                    <a:lnTlToBr w="12700" cmpd="sng">
+                      <a:noFill/>
+                      <a:prstDash val="solid"/>
+                    </a:lnTlToBr>
+                    <a:lnBlToTr w="12700" cmpd="sng">
+                      <a:noFill/>
+                      <a:prstDash val="solid"/>
+                    </a:lnBlToTr>
                     <a:solidFill>
-                      <a:schemeClr val="bg1">
-                        <a:lumMod val="95000"/>
-                      </a:schemeClr>
+                      <a:schemeClr val="bg1"/>
                     </a:solidFill>
                   </a:tcPr>
                 </a:tc>
@@ -7131,14 +7775,14 @@
           <p:nvPr>
             <p:extLst>
               <p:ext uri="{D42A27DB-BD31-4B8C-83A1-F6EECF244321}">
-                <p14:modId xmlns:p14="http://schemas.microsoft.com/office/powerpoint/2010/main" val="3421124217"/>
+                <p14:modId xmlns:p14="http://schemas.microsoft.com/office/powerpoint/2010/main" val="2073960628"/>
               </p:ext>
             </p:extLst>
           </p:nvPr>
         </p:nvGraphicFramePr>
         <p:xfrm>
           <a:off x="6332220" y="1522776"/>
-          <a:ext cx="5558980" cy="2225039"/>
+          <a:ext cx="5558980" cy="2225040"/>
         </p:xfrm>
         <a:graphic>
           <a:graphicData uri="http://schemas.openxmlformats.org/drawingml/2006/table">
@@ -7186,7 +7830,7 @@
                           <a:latin typeface="Arial" panose="020B0604020202020204" pitchFamily="34" charset="0"/>
                           <a:cs typeface="Arial" panose="020B0604020202020204" pitchFamily="34" charset="0"/>
                         </a:rPr>
-                        <a:t>База данных хранится в формате </a:t>
+                        <a:t>База данных хранится в отдельном файле </a:t>
                       </a:r>
                       <a:r>
                         <a:rPr lang="en-US" sz="2000" b="0" dirty="0">
@@ -7219,7 +7863,7 @@
                           <a:latin typeface="Arial" panose="020B0604020202020204" pitchFamily="34" charset="0"/>
                           <a:cs typeface="Arial" panose="020B0604020202020204" pitchFamily="34" charset="0"/>
                         </a:rPr>
-                        <a:t>Выполняется регулярное сохранение копии файла базы</a:t>
+                        <a:t>Возможность создания резервной копии путём копирования файла БД.</a:t>
                       </a:r>
                     </a:p>
                     <a:p>
@@ -7235,51 +7879,49 @@
                           <a:latin typeface="Arial" panose="020B0604020202020204" pitchFamily="34" charset="0"/>
                           <a:cs typeface="Arial" panose="020B0604020202020204" pitchFamily="34" charset="0"/>
                         </a:rPr>
-                        <a:t>Возможность восстановления данных из резервной копии</a:t>
+                        <a:t>При необходимости данные могут быть восстановлены из сохранённой копии.</a:t>
                       </a:r>
                     </a:p>
                   </a:txBody>
                   <a:tcPr>
                     <a:lnL w="12700" cap="flat" cmpd="sng" algn="ctr">
-                      <a:solidFill>
-                        <a:schemeClr val="tx1"/>
-                      </a:solidFill>
+                      <a:noFill/>
                       <a:prstDash val="solid"/>
                       <a:round/>
                       <a:headEnd type="none" w="med" len="med"/>
                       <a:tailEnd type="none" w="med" len="med"/>
                     </a:lnL>
                     <a:lnR w="12700" cap="flat" cmpd="sng" algn="ctr">
-                      <a:solidFill>
-                        <a:schemeClr val="tx1"/>
-                      </a:solidFill>
+                      <a:noFill/>
                       <a:prstDash val="solid"/>
                       <a:round/>
                       <a:headEnd type="none" w="med" len="med"/>
                       <a:tailEnd type="none" w="med" len="med"/>
                     </a:lnR>
                     <a:lnT w="12700" cap="flat" cmpd="sng" algn="ctr">
-                      <a:solidFill>
-                        <a:schemeClr val="tx1"/>
-                      </a:solidFill>
+                      <a:noFill/>
                       <a:prstDash val="solid"/>
                       <a:round/>
                       <a:headEnd type="none" w="med" len="med"/>
                       <a:tailEnd type="none" w="med" len="med"/>
                     </a:lnT>
                     <a:lnB w="12700" cap="flat" cmpd="sng" algn="ctr">
-                      <a:solidFill>
-                        <a:schemeClr val="tx1"/>
-                      </a:solidFill>
+                      <a:noFill/>
                       <a:prstDash val="solid"/>
                       <a:round/>
                       <a:headEnd type="none" w="med" len="med"/>
                       <a:tailEnd type="none" w="med" len="med"/>
                     </a:lnB>
+                    <a:lnTlToBr w="12700" cmpd="sng">
+                      <a:noFill/>
+                      <a:prstDash val="solid"/>
+                    </a:lnTlToBr>
+                    <a:lnBlToTr w="12700" cmpd="sng">
+                      <a:noFill/>
+                      <a:prstDash val="solid"/>
+                    </a:lnBlToTr>
                     <a:solidFill>
-                      <a:schemeClr val="bg1">
-                        <a:lumMod val="95000"/>
-                      </a:schemeClr>
+                      <a:schemeClr val="bg1"/>
                     </a:solidFill>
                   </a:tcPr>
                 </a:tc>
@@ -8133,49 +8775,21 @@
                 <a:latin typeface="Arial" panose="020B0604020202020204" pitchFamily="34" charset="0"/>
                 <a:cs typeface="Arial" panose="020B0604020202020204" pitchFamily="34" charset="0"/>
               </a:rPr>
-              <a:t>Достигнутые результаты: спроектирована и нормализована база данных в </a:t>
-            </a:r>
-            <a:r>
-              <a:rPr lang="en-US" sz="2000" spc="0" dirty="0" err="1">
-                <a:latin typeface="Arial" panose="020B0604020202020204" pitchFamily="34" charset="0"/>
-                <a:cs typeface="Arial" panose="020B0604020202020204" pitchFamily="34" charset="0"/>
-              </a:rPr>
-              <a:t>sqlite</a:t>
+              <a:t>Разработана база данных </a:t>
+            </a:r>
+            <a:r>
+              <a:rPr lang="ru-RU" sz="2000" spc="0" dirty="0" err="1">
+                <a:latin typeface="Arial" panose="020B0604020202020204" pitchFamily="34" charset="0"/>
+                <a:cs typeface="Arial" panose="020B0604020202020204" pitchFamily="34" charset="0"/>
+              </a:rPr>
+              <a:t>SQLite</a:t>
             </a:r>
             <a:r>
               <a:rPr lang="ru-RU" sz="2000" spc="0" dirty="0">
                 <a:latin typeface="Arial" panose="020B0604020202020204" pitchFamily="34" charset="0"/>
                 <a:cs typeface="Arial" panose="020B0604020202020204" pitchFamily="34" charset="0"/>
               </a:rPr>
-              <a:t>, создан макет веб-приложения в </a:t>
-            </a:r>
-            <a:r>
-              <a:rPr lang="ru-RU" sz="2000" spc="0" dirty="0" err="1">
-                <a:latin typeface="Arial" panose="020B0604020202020204" pitchFamily="34" charset="0"/>
-                <a:cs typeface="Arial" panose="020B0604020202020204" pitchFamily="34" charset="0"/>
-              </a:rPr>
-              <a:t>фигме</a:t>
-            </a:r>
-            <a:r>
-              <a:rPr lang="ru-RU" sz="2000" spc="0" dirty="0">
-                <a:latin typeface="Arial" panose="020B0604020202020204" pitchFamily="34" charset="0"/>
-                <a:cs typeface="Arial" panose="020B0604020202020204" pitchFamily="34" charset="0"/>
-              </a:rPr>
-              <a:t>, разработано веб-приложение на </a:t>
-            </a:r>
-            <a:r>
-              <a:rPr lang="en-US" sz="2000" spc="0" dirty="0">
-                <a:latin typeface="Arial" panose="020B0604020202020204" pitchFamily="34" charset="0"/>
-                <a:cs typeface="Arial" panose="020B0604020202020204" pitchFamily="34" charset="0"/>
-              </a:rPr>
-              <a:t>node.js </a:t>
-            </a:r>
-            <a:r>
-              <a:rPr lang="ru-RU" sz="2000" spc="0" dirty="0">
-                <a:latin typeface="Arial" panose="020B0604020202020204" pitchFamily="34" charset="0"/>
-                <a:cs typeface="Arial" panose="020B0604020202020204" pitchFamily="34" charset="0"/>
-              </a:rPr>
-              <a:t>с системой аутентификации, проведено тестирование</a:t>
+              <a:t>. Создано веб-приложение аренды жилья на PHP. Реализованы регистрация и авторизация пользователей. Созданы личный кабинет и административная панель. Добавлены поиск, фильтрация, избранное и заявки. Проведено тестирование системы.</a:t>
             </a:r>
           </a:p>
           <a:p>
@@ -8699,7 +9313,7 @@
                 <a:ea typeface="+mj-ea"/>
                 <a:cs typeface="Arial" panose="020B0604020202020204" pitchFamily="34" charset="0"/>
               </a:rPr>
-              <a:t>Развитие цифровых сервисов повышает спрос на онлайн-платформы аренды недвижимости.</a:t>
+              <a:t>Рынок аренды жилья активно развивается, поэтому пользователям необходим удобный цифровой сервис для поиска и бронирования объектов.</a:t>
             </a:r>
             <a:br>
               <a:rPr lang="ru-RU" sz="2000" cap="all" dirty="0">
@@ -8726,7 +9340,7 @@
                 <a:ea typeface="+mj-ea"/>
                 <a:cs typeface="Arial" panose="020B0604020202020204" pitchFamily="34" charset="0"/>
               </a:rPr>
-              <a:t>Разработка веб-приложения позволяет упростить поиск и бронирование жилья.</a:t>
+              <a:t>Автоматизация обработки объявлений и заявок упрощает взаимодействие между пользователем и арендодателем.</a:t>
             </a:r>
             <a:br>
               <a:rPr lang="ru-RU" sz="2000" cap="all" dirty="0">
@@ -8753,7 +9367,7 @@
                 <a:ea typeface="+mj-ea"/>
                 <a:cs typeface="Arial" panose="020B0604020202020204" pitchFamily="34" charset="0"/>
               </a:rPr>
-              <a:t>Проект демонстрирует применение современных технологий и имеет практическую значимость, может быть использовано как основа для реального сервиса.</a:t>
+              <a:t>Разработка данной системы имеет практическую значимость и может служить основой для реального веб-сервиса аренды жилья..</a:t>
             </a:r>
           </a:p>
         </p:txBody>
@@ -9063,7 +9677,7 @@
                 <a:ea typeface="+mj-ea"/>
                 <a:cs typeface="Arial" panose="020B0604020202020204" pitchFamily="34" charset="0"/>
               </a:rPr>
-              <a:t>• Анализ предметной области</a:t>
+              <a:t>• Проанализировать предметную область аренды жилья.</a:t>
             </a:r>
             <a:br>
               <a:rPr lang="ru-RU" sz="2000" cap="all" dirty="0">
@@ -9090,10 +9704,10 @@
                 <a:ea typeface="+mj-ea"/>
                 <a:cs typeface="Arial" panose="020B0604020202020204" pitchFamily="34" charset="0"/>
               </a:rPr>
-              <a:t>• Спроектировать логическую и физическую структуру </a:t>
-            </a:r>
-            <a:r>
-              <a:rPr lang="ru-RU" sz="2000" cap="all">
+              <a:t>• Спроектировать логическую и физическую структуру базы данных.</a:t>
+            </a:r>
+            <a:br>
+              <a:rPr lang="ru-RU" sz="2000" cap="all" dirty="0">
                 <a:solidFill>
                   <a:schemeClr val="tx1">
                     <a:lumMod val="85000"/>
@@ -9104,9 +9718,8 @@
                 <a:ea typeface="+mj-ea"/>
                 <a:cs typeface="Arial" panose="020B0604020202020204" pitchFamily="34" charset="0"/>
               </a:rPr>
-              <a:t>базы данных</a:t>
-            </a:r>
-            <a:br>
+            </a:br>
+            <a:r>
               <a:rPr lang="ru-RU" sz="2000" cap="all" dirty="0">
                 <a:solidFill>
                   <a:schemeClr val="tx1">
@@ -9118,8 +9731,9 @@
                 <a:ea typeface="+mj-ea"/>
                 <a:cs typeface="Arial" panose="020B0604020202020204" pitchFamily="34" charset="0"/>
               </a:rPr>
-            </a:br>
-            <a:r>
+              <a:t>• Разработать клиентскую часть веб-приложения.</a:t>
+            </a:r>
+            <a:br>
               <a:rPr lang="ru-RU" sz="2000" cap="all" dirty="0">
                 <a:solidFill>
                   <a:schemeClr val="tx1">
@@ -9131,10 +9745,9 @@
                 <a:ea typeface="+mj-ea"/>
                 <a:cs typeface="Arial" panose="020B0604020202020204" pitchFamily="34" charset="0"/>
               </a:rPr>
-              <a:t>• Разработка </a:t>
-            </a:r>
-            <a:r>
-              <a:rPr lang="ru-RU" sz="2000" cap="all" dirty="0" err="1">
+            </a:br>
+            <a:r>
+              <a:rPr lang="ru-RU" sz="2000" cap="all" dirty="0">
                 <a:solidFill>
                   <a:schemeClr val="tx1">
                     <a:lumMod val="85000"/>
@@ -9145,7 +9758,7 @@
                 <a:ea typeface="+mj-ea"/>
                 <a:cs typeface="Arial" panose="020B0604020202020204" pitchFamily="34" charset="0"/>
               </a:rPr>
-              <a:t>фронтенда</a:t>
+              <a:t>• Разработать серверную часть веб-приложения.</a:t>
             </a:r>
             <a:br>
               <a:rPr lang="ru-RU" sz="2000" cap="all" dirty="0">
@@ -9172,34 +9785,7 @@
                 <a:ea typeface="+mj-ea"/>
                 <a:cs typeface="Arial" panose="020B0604020202020204" pitchFamily="34" charset="0"/>
               </a:rPr>
-              <a:t>• Разработка бэкенда</a:t>
-            </a:r>
-            <a:br>
-              <a:rPr lang="ru-RU" sz="2000" cap="all" dirty="0">
-                <a:solidFill>
-                  <a:schemeClr val="tx1">
-                    <a:lumMod val="85000"/>
-                    <a:lumOff val="15000"/>
-                  </a:schemeClr>
-                </a:solidFill>
-                <a:latin typeface="Arial" panose="020B0604020202020204" pitchFamily="34" charset="0"/>
-                <a:ea typeface="+mj-ea"/>
-                <a:cs typeface="Arial" panose="020B0604020202020204" pitchFamily="34" charset="0"/>
-              </a:rPr>
-            </a:br>
-            <a:r>
-              <a:rPr lang="ru-RU" sz="2000" cap="all" dirty="0">
-                <a:solidFill>
-                  <a:schemeClr val="tx1">
-                    <a:lumMod val="85000"/>
-                    <a:lumOff val="15000"/>
-                  </a:schemeClr>
-                </a:solidFill>
-                <a:latin typeface="Arial" panose="020B0604020202020204" pitchFamily="34" charset="0"/>
-                <a:ea typeface="+mj-ea"/>
-                <a:cs typeface="Arial" panose="020B0604020202020204" pitchFamily="34" charset="0"/>
-              </a:rPr>
-              <a:t>• Тестирование системы</a:t>
+              <a:t>• Провести тестирование разработанной системы.</a:t>
             </a:r>
           </a:p>
         </p:txBody>
@@ -9444,7 +10030,7 @@
           <p:nvPr>
             <p:extLst>
               <p:ext uri="{D42A27DB-BD31-4B8C-83A1-F6EECF244321}">
-                <p14:modId xmlns:p14="http://schemas.microsoft.com/office/powerpoint/2010/main" val="1142719721"/>
+                <p14:modId xmlns:p14="http://schemas.microsoft.com/office/powerpoint/2010/main" val="580413749"/>
               </p:ext>
             </p:extLst>
           </p:nvPr>
@@ -10067,7 +10653,7 @@
         </p:nvSpPr>
         <p:spPr>
           <a:xfrm>
-            <a:off x="2002020" y="4983524"/>
+            <a:off x="2002020" y="5109468"/>
             <a:ext cx="8717147" cy="1323439"/>
           </a:xfrm>
           <a:prstGeom prst="rect">
@@ -10098,7 +10684,45 @@
                 <a:ea typeface="+mj-ea"/>
                 <a:cs typeface="Arial" panose="020B0604020202020204" pitchFamily="34" charset="0"/>
               </a:rPr>
-              <a:t>Разрабатываемое приложение ориентировано на упрощённый и понятный интерфейс, структурированное представление объявлений и демонстрацию ключевых функций системы аренды, что делает его удобным для пользователей и наглядным для учебных целей.</a:t>
+              <a:t>Разрабатываемое приложение отличается упрощённой структурой, понятным интерфейсом и реализацией только ключевых функций аренды жилья, что делает систему более наглядной, удобной и подходящей для учебного проекта.</a:t>
+            </a:r>
+          </a:p>
+        </p:txBody>
+      </p:sp>
+      <p:sp>
+        <p:nvSpPr>
+          <p:cNvPr id="6" name="TextBox 5">
+            <a:extLst>
+              <a:ext uri="{FF2B5EF4-FFF2-40B4-BE49-F238E27FC236}">
+                <a16:creationId xmlns:a16="http://schemas.microsoft.com/office/drawing/2014/main" id="{8925F222-76B7-4CD2-98BE-58AD2237002F}"/>
+              </a:ext>
+            </a:extLst>
+          </p:cNvPr>
+          <p:cNvSpPr txBox="1"/>
+          <p:nvPr/>
+        </p:nvSpPr>
+        <p:spPr>
+          <a:xfrm>
+            <a:off x="3240512" y="4801691"/>
+            <a:ext cx="6240162" cy="307777"/>
+          </a:xfrm>
+          <a:prstGeom prst="rect">
+            <a:avLst/>
+          </a:prstGeom>
+          <a:noFill/>
+        </p:spPr>
+        <p:txBody>
+          <a:bodyPr wrap="square" rtlCol="0">
+            <a:spAutoFit/>
+          </a:bodyPr>
+          <a:lstStyle/>
+          <a:p>
+            <a:r>
+              <a:rPr lang="ru-RU" sz="1400" dirty="0">
+                <a:latin typeface="Arial" panose="020B0604020202020204" pitchFamily="34" charset="0"/>
+                <a:cs typeface="Arial" panose="020B0604020202020204" pitchFamily="34" charset="0"/>
+              </a:rPr>
+              <a:t>Таблица аналогов с достоинствами и недостатками</a:t>
             </a:r>
           </a:p>
         </p:txBody>
@@ -10983,7 +11607,7 @@
         <p:spPr>
           <a:xfrm>
             <a:off x="261257" y="1381787"/>
-            <a:ext cx="11451772" cy="4678204"/>
+            <a:ext cx="11451772" cy="4955203"/>
           </a:xfrm>
           <a:prstGeom prst="rect">
             <a:avLst/>
@@ -10997,7 +11621,7 @@
           <a:lstStyle/>
           <a:p>
             <a:r>
-              <a:rPr lang="ru-RU" sz="2800" dirty="0">
+              <a:rPr lang="ru-RU" sz="2400" dirty="0">
                 <a:solidFill>
                   <a:schemeClr val="tx1">
                     <a:lumMod val="85000"/>
@@ -11008,7 +11632,7 @@
                 <a:ea typeface="+mj-ea"/>
                 <a:cs typeface="Arial" panose="020B0604020202020204" pitchFamily="34" charset="0"/>
               </a:rPr>
-              <a:t>Для серверной части выбрана платформа Node.js, так как она обеспечивает удобную обработку запросов и широко используется в веб-разработке.</a:t>
+              <a:t>Для серверной части сайта выбрана платформа PHP, так как она обеспечивает удобную обработку запросов пользователей и работу с базой данных.</a:t>
             </a:r>
           </a:p>
           <a:p>
@@ -11026,7 +11650,7 @@
           </a:p>
           <a:p>
             <a:r>
-              <a:rPr lang="ru-RU" sz="2800" dirty="0" err="1">
+              <a:rPr lang="ru-RU" sz="2400" dirty="0">
                 <a:solidFill>
                   <a:schemeClr val="tx1">
                     <a:lumMod val="85000"/>
@@ -11037,25 +11661,11 @@
                 <a:ea typeface="+mj-ea"/>
                 <a:cs typeface="Arial" panose="020B0604020202020204" pitchFamily="34" charset="0"/>
               </a:rPr>
-              <a:t>Фронтенд</a:t>
-            </a:r>
-            <a:r>
-              <a:rPr lang="ru-RU" sz="2800" dirty="0">
-                <a:solidFill>
-                  <a:schemeClr val="tx1">
-                    <a:lumMod val="85000"/>
-                    <a:lumOff val="15000"/>
-                  </a:schemeClr>
-                </a:solidFill>
-                <a:latin typeface="Arial" panose="020B0604020202020204" pitchFamily="34" charset="0"/>
-                <a:ea typeface="+mj-ea"/>
-                <a:cs typeface="Arial" panose="020B0604020202020204" pitchFamily="34" charset="0"/>
-              </a:rPr>
-              <a:t> реализован с использованием HTML, CSS и JavaScript, что позволяет создать простой и адаптивный интерфейс.</a:t>
-            </a:r>
-          </a:p>
-          <a:p>
-            <a:endParaRPr lang="ru-RU" sz="2800" dirty="0">
+              <a:t>Для клиентской части использованы HTML, CSS и JavaScript, поскольку они позволяют создать понятный, адаптивный и интерактивный интерфейс веб-приложения.</a:t>
+            </a:r>
+          </a:p>
+          <a:p>
+            <a:endParaRPr lang="ru-RU" sz="2400" dirty="0">
               <a:solidFill>
                 <a:schemeClr val="tx1">
                   <a:lumMod val="85000"/>
@@ -11069,7 +11679,7 @@
           </a:p>
           <a:p>
             <a:r>
-              <a:rPr lang="ru-RU" sz="2800" dirty="0">
+              <a:rPr lang="ru-RU" sz="2400" dirty="0">
                 <a:solidFill>
                   <a:schemeClr val="tx1">
                     <a:lumMod val="85000"/>
@@ -11080,10 +11690,10 @@
                 <a:ea typeface="+mj-ea"/>
                 <a:cs typeface="Arial" panose="020B0604020202020204" pitchFamily="34" charset="0"/>
               </a:rPr>
-              <a:t>В качестве инструментов разработки использованы Visual Studio Code для написания кода, DB </a:t>
-            </a:r>
-            <a:r>
-              <a:rPr lang="ru-RU" sz="2800" dirty="0" err="1">
+              <a:t>В качестве СУБД выбрана </a:t>
+            </a:r>
+            <a:r>
+              <a:rPr lang="ru-RU" sz="2400" dirty="0" err="1">
                 <a:solidFill>
                   <a:schemeClr val="tx1">
                     <a:lumMod val="85000"/>
@@ -11094,10 +11704,10 @@
                 <a:ea typeface="+mj-ea"/>
                 <a:cs typeface="Arial" panose="020B0604020202020204" pitchFamily="34" charset="0"/>
               </a:rPr>
-              <a:t>Browser</a:t>
-            </a:r>
-            <a:r>
-              <a:rPr lang="ru-RU" sz="2800" dirty="0">
+              <a:t>SQLite</a:t>
+            </a:r>
+            <a:r>
+              <a:rPr lang="ru-RU" sz="2400" dirty="0">
                 <a:solidFill>
                   <a:schemeClr val="tx1">
                     <a:lumMod val="85000"/>
@@ -11108,10 +11718,25 @@
                 <a:ea typeface="+mj-ea"/>
                 <a:cs typeface="Arial" panose="020B0604020202020204" pitchFamily="34" charset="0"/>
               </a:rPr>
-              <a:t> </a:t>
-            </a:r>
-            <a:r>
-              <a:rPr lang="ru-RU" sz="2800" dirty="0" err="1">
+              <a:t>, так как она не требует отдельного сервера, проста в настройке и подходит для небольших учебных проектов.</a:t>
+            </a:r>
+          </a:p>
+          <a:p>
+            <a:endParaRPr lang="ru-RU" sz="2400" dirty="0">
+              <a:solidFill>
+                <a:schemeClr val="tx1">
+                  <a:lumMod val="85000"/>
+                  <a:lumOff val="15000"/>
+                </a:schemeClr>
+              </a:solidFill>
+              <a:latin typeface="Arial" panose="020B0604020202020204" pitchFamily="34" charset="0"/>
+              <a:ea typeface="+mj-ea"/>
+              <a:cs typeface="Arial" panose="020B0604020202020204" pitchFamily="34" charset="0"/>
+            </a:endParaRPr>
+          </a:p>
+          <a:p>
+            <a:r>
+              <a:rPr lang="ru-RU" sz="2400" dirty="0">
                 <a:solidFill>
                   <a:schemeClr val="tx1">
                     <a:lumMod val="85000"/>
@@ -11122,10 +11747,10 @@
                 <a:ea typeface="+mj-ea"/>
                 <a:cs typeface="Arial" panose="020B0604020202020204" pitchFamily="34" charset="0"/>
               </a:rPr>
-              <a:t>for</a:t>
-            </a:r>
-            <a:r>
-              <a:rPr lang="ru-RU" sz="2800" dirty="0">
+              <a:t>В качестве инструментов разработки использованы Visual Studio Code, DB </a:t>
+            </a:r>
+            <a:r>
+              <a:rPr lang="ru-RU" sz="2400" dirty="0" err="1">
                 <a:solidFill>
                   <a:schemeClr val="tx1">
                     <a:lumMod val="85000"/>
@@ -11136,10 +11761,10 @@
                 <a:ea typeface="+mj-ea"/>
                 <a:cs typeface="Arial" panose="020B0604020202020204" pitchFamily="34" charset="0"/>
               </a:rPr>
-              <a:t> </a:t>
-            </a:r>
-            <a:r>
-              <a:rPr lang="ru-RU" sz="2800" dirty="0" err="1">
+              <a:t>Browser</a:t>
+            </a:r>
+            <a:r>
+              <a:rPr lang="ru-RU" sz="2400" dirty="0">
                 <a:solidFill>
                   <a:schemeClr val="tx1">
                     <a:lumMod val="85000"/>
@@ -11150,10 +11775,10 @@
                 <a:ea typeface="+mj-ea"/>
                 <a:cs typeface="Arial" panose="020B0604020202020204" pitchFamily="34" charset="0"/>
               </a:rPr>
-              <a:t>SQLite</a:t>
-            </a:r>
-            <a:r>
-              <a:rPr lang="ru-RU" sz="2800" dirty="0">
+              <a:t> </a:t>
+            </a:r>
+            <a:r>
+              <a:rPr lang="ru-RU" sz="2400" dirty="0" err="1">
                 <a:solidFill>
                   <a:schemeClr val="tx1">
                     <a:lumMod val="85000"/>
@@ -11164,10 +11789,10 @@
                 <a:ea typeface="+mj-ea"/>
                 <a:cs typeface="Arial" panose="020B0604020202020204" pitchFamily="34" charset="0"/>
               </a:rPr>
-              <a:t> для работы с базой данных и </a:t>
-            </a:r>
-            <a:r>
-              <a:rPr lang="ru-RU" sz="2800" dirty="0" err="1">
+              <a:t>for</a:t>
+            </a:r>
+            <a:r>
+              <a:rPr lang="ru-RU" sz="2400" dirty="0">
                 <a:solidFill>
                   <a:schemeClr val="tx1">
                     <a:lumMod val="85000"/>
@@ -11178,10 +11803,10 @@
                 <a:ea typeface="+mj-ea"/>
                 <a:cs typeface="Arial" panose="020B0604020202020204" pitchFamily="34" charset="0"/>
               </a:rPr>
-              <a:t>Figma</a:t>
-            </a:r>
-            <a:r>
-              <a:rPr lang="ru-RU" sz="2800" dirty="0">
+              <a:t> </a:t>
+            </a:r>
+            <a:r>
+              <a:rPr lang="ru-RU" sz="2400" dirty="0" err="1">
                 <a:solidFill>
                   <a:schemeClr val="tx1">
                     <a:lumMod val="85000"/>
@@ -11192,12 +11817,50 @@
                 <a:ea typeface="+mj-ea"/>
                 <a:cs typeface="Arial" panose="020B0604020202020204" pitchFamily="34" charset="0"/>
               </a:rPr>
-              <a:t> для проектирования интерфейса.</a:t>
-            </a:r>
-          </a:p>
-          <a:p>
-            <a:pPr algn="ctr"/>
-            <a:endParaRPr lang="ru-RU" dirty="0"/>
+              <a:t>SQLite</a:t>
+            </a:r>
+            <a:r>
+              <a:rPr lang="ru-RU" sz="2400" dirty="0">
+                <a:solidFill>
+                  <a:schemeClr val="tx1">
+                    <a:lumMod val="85000"/>
+                    <a:lumOff val="15000"/>
+                  </a:schemeClr>
+                </a:solidFill>
+                <a:latin typeface="Arial" panose="020B0604020202020204" pitchFamily="34" charset="0"/>
+                <a:ea typeface="+mj-ea"/>
+                <a:cs typeface="Arial" panose="020B0604020202020204" pitchFamily="34" charset="0"/>
+              </a:rPr>
+              <a:t> и </a:t>
+            </a:r>
+            <a:r>
+              <a:rPr lang="ru-RU" sz="2400" dirty="0" err="1">
+                <a:solidFill>
+                  <a:schemeClr val="tx1">
+                    <a:lumMod val="85000"/>
+                    <a:lumOff val="15000"/>
+                  </a:schemeClr>
+                </a:solidFill>
+                <a:latin typeface="Arial" panose="020B0604020202020204" pitchFamily="34" charset="0"/>
+                <a:ea typeface="+mj-ea"/>
+                <a:cs typeface="Arial" panose="020B0604020202020204" pitchFamily="34" charset="0"/>
+              </a:rPr>
+              <a:t>Figma</a:t>
+            </a:r>
+            <a:r>
+              <a:rPr lang="ru-RU" sz="2400" dirty="0">
+                <a:solidFill>
+                  <a:schemeClr val="tx1">
+                    <a:lumMod val="85000"/>
+                    <a:lumOff val="15000"/>
+                  </a:schemeClr>
+                </a:solidFill>
+                <a:latin typeface="Arial" panose="020B0604020202020204" pitchFamily="34" charset="0"/>
+                <a:ea typeface="+mj-ea"/>
+                <a:cs typeface="Arial" panose="020B0604020202020204" pitchFamily="34" charset="0"/>
+              </a:rPr>
+              <a:t>.</a:t>
+            </a:r>
           </a:p>
         </p:txBody>
       </p:sp>
@@ -11437,10 +12100,10 @@
       </p:sp>
       <p:pic>
         <p:nvPicPr>
-          <p:cNvPr id="7" name="Рисунок 6">
+          <p:cNvPr id="11" name="Рисунок 10">
             <a:extLst>
               <a:ext uri="{FF2B5EF4-FFF2-40B4-BE49-F238E27FC236}">
-                <a16:creationId xmlns:a16="http://schemas.microsoft.com/office/drawing/2014/main" id="{CAB11DD2-5414-41F6-AEC8-CDD3D88A2DF4}"/>
+                <a16:creationId xmlns:a16="http://schemas.microsoft.com/office/drawing/2014/main" id="{932F7156-71F7-442D-9B84-4CC75C089507}"/>
               </a:ext>
             </a:extLst>
           </p:cNvPr>
@@ -11457,8 +12120,8 @@
         </p:blipFill>
         <p:spPr>
           <a:xfrm>
-            <a:off x="423071" y="1782020"/>
-            <a:ext cx="11345858" cy="3293960"/>
+            <a:off x="2671524" y="1554480"/>
+            <a:ext cx="6848952" cy="3749040"/>
           </a:xfrm>
           <a:prstGeom prst="rect">
             <a:avLst/>
@@ -11635,12 +12298,51 @@
           </a:p>
         </p:txBody>
       </p:sp>
+      <p:sp>
+        <p:nvSpPr>
+          <p:cNvPr id="6" name="TextBox 5">
+            <a:extLst>
+              <a:ext uri="{FF2B5EF4-FFF2-40B4-BE49-F238E27FC236}">
+                <a16:creationId xmlns:a16="http://schemas.microsoft.com/office/drawing/2014/main" id="{6890BC16-9485-4A4D-9BDC-FAF42E4C2277}"/>
+              </a:ext>
+            </a:extLst>
+          </p:cNvPr>
+          <p:cNvSpPr txBox="1"/>
+          <p:nvPr/>
+        </p:nvSpPr>
+        <p:spPr>
+          <a:xfrm>
+            <a:off x="514865" y="5514027"/>
+            <a:ext cx="11162270" cy="400110"/>
+          </a:xfrm>
+          <a:prstGeom prst="rect">
+            <a:avLst/>
+          </a:prstGeom>
+          <a:noFill/>
+        </p:spPr>
+        <p:txBody>
+          <a:bodyPr wrap="square" rtlCol="0">
+            <a:spAutoFit/>
+          </a:bodyPr>
+          <a:lstStyle/>
+          <a:p>
+            <a:pPr algn="ctr"/>
+            <a:r>
+              <a:rPr lang="ru-RU" sz="2000" dirty="0">
+                <a:latin typeface="Arial" panose="020B0604020202020204" pitchFamily="34" charset="0"/>
+                <a:cs typeface="Arial" panose="020B0604020202020204" pitchFamily="34" charset="0"/>
+              </a:rPr>
+              <a:t>Логическая модель с основными таблицами и связями</a:t>
+            </a:r>
+          </a:p>
+        </p:txBody>
+      </p:sp>
       <p:pic>
         <p:nvPicPr>
-          <p:cNvPr id="5" name="Рисунок 4">
+          <p:cNvPr id="11" name="Рисунок 10">
             <a:extLst>
               <a:ext uri="{FF2B5EF4-FFF2-40B4-BE49-F238E27FC236}">
-                <a16:creationId xmlns:a16="http://schemas.microsoft.com/office/drawing/2014/main" id="{8D2F57C1-6016-4CAD-9D47-99E808989942}"/>
+                <a16:creationId xmlns:a16="http://schemas.microsoft.com/office/drawing/2014/main" id="{F47310A4-C067-477E-A93D-1E10C50AB9F5}"/>
               </a:ext>
             </a:extLst>
           </p:cNvPr>
@@ -11657,60 +12359,14 @@
         </p:blipFill>
         <p:spPr>
           <a:xfrm>
-            <a:off x="342097" y="1538023"/>
-            <a:ext cx="11507806" cy="3781953"/>
+            <a:off x="2887362" y="1409603"/>
+            <a:ext cx="6417276" cy="4038794"/>
           </a:xfrm>
           <a:prstGeom prst="rect">
             <a:avLst/>
           </a:prstGeom>
         </p:spPr>
       </p:pic>
-      <p:sp>
-        <p:nvSpPr>
-          <p:cNvPr id="6" name="TextBox 5">
-            <a:extLst>
-              <a:ext uri="{FF2B5EF4-FFF2-40B4-BE49-F238E27FC236}">
-                <a16:creationId xmlns:a16="http://schemas.microsoft.com/office/drawing/2014/main" id="{6890BC16-9485-4A4D-9BDC-FAF42E4C2277}"/>
-              </a:ext>
-            </a:extLst>
-          </p:cNvPr>
-          <p:cNvSpPr txBox="1"/>
-          <p:nvPr/>
-        </p:nvSpPr>
-        <p:spPr>
-          <a:xfrm>
-            <a:off x="342097" y="5425440"/>
-            <a:ext cx="11507806" cy="707886"/>
-          </a:xfrm>
-          <a:prstGeom prst="rect">
-            <a:avLst/>
-          </a:prstGeom>
-          <a:noFill/>
-        </p:spPr>
-        <p:txBody>
-          <a:bodyPr wrap="square" rtlCol="0">
-            <a:spAutoFit/>
-          </a:bodyPr>
-          <a:lstStyle/>
-          <a:p>
-            <a:pPr algn="ctr"/>
-            <a:r>
-              <a:rPr lang="ru-RU" sz="2000" cap="all" dirty="0">
-                <a:solidFill>
-                  <a:schemeClr val="tx1">
-                    <a:lumMod val="85000"/>
-                    <a:lumOff val="15000"/>
-                  </a:schemeClr>
-                </a:solidFill>
-                <a:latin typeface="Arial" panose="020B0604020202020204" pitchFamily="34" charset="0"/>
-                <a:ea typeface="+mj-ea"/>
-                <a:cs typeface="Arial" panose="020B0604020202020204" pitchFamily="34" charset="0"/>
-              </a:rPr>
-              <a:t>Логическая модель отражает структуру базы данных, включая таблицы, их атрибуты и связи между сущностями системы аренды жилья.</a:t>
-            </a:r>
-          </a:p>
-        </p:txBody>
-      </p:sp>
     </p:spTree>
     <p:extLst>
       <p:ext uri="{BB962C8B-B14F-4D97-AF65-F5344CB8AC3E}">
@@ -11896,7 +12552,7 @@
         <p:spPr>
           <a:xfrm>
             <a:off x="1123406" y="5341552"/>
-            <a:ext cx="9945188" cy="1015663"/>
+            <a:ext cx="9945188" cy="707886"/>
           </a:xfrm>
           <a:prstGeom prst="rect">
             <a:avLst/>
@@ -11911,28 +12567,119 @@
           <a:p>
             <a:pPr algn="ctr"/>
             <a:r>
-              <a:rPr lang="ru-RU" sz="2000" cap="all" dirty="0">
-                <a:solidFill>
-                  <a:schemeClr val="tx1">
-                    <a:lumMod val="85000"/>
-                    <a:lumOff val="15000"/>
-                  </a:schemeClr>
-                </a:solidFill>
-                <a:latin typeface="Arial" panose="020B0604020202020204" pitchFamily="34" charset="0"/>
-                <a:ea typeface="+mj-ea"/>
-                <a:cs typeface="Arial" panose="020B0604020202020204" pitchFamily="34" charset="0"/>
-              </a:rPr>
-              <a:t>Представлена физическая модель базы данных, включающая таблицы пользователей и бронирований с указанием атрибутов и типов данных.</a:t>
-            </a:r>
+              <a:rPr lang="ru-RU" sz="2000" dirty="0">
+                <a:latin typeface="Arial" panose="020B0604020202020204" pitchFamily="34" charset="0"/>
+                <a:cs typeface="Arial" panose="020B0604020202020204" pitchFamily="34" charset="0"/>
+              </a:rPr>
+              <a:t>Представлена физическая модель базы данных, включающая таблицы пользователей и заявок с указанием атрибутов и типов данных.</a:t>
+            </a:r>
+          </a:p>
+        </p:txBody>
+      </p:sp>
+      <p:sp>
+        <p:nvSpPr>
+          <p:cNvPr id="11" name="TextBox 10">
+            <a:extLst>
+              <a:ext uri="{FF2B5EF4-FFF2-40B4-BE49-F238E27FC236}">
+                <a16:creationId xmlns:a16="http://schemas.microsoft.com/office/drawing/2014/main" id="{4B153221-E659-4ED6-B7FD-ACA2EBA9E463}"/>
+              </a:ext>
+            </a:extLst>
+          </p:cNvPr>
+          <p:cNvSpPr txBox="1"/>
+          <p:nvPr/>
+        </p:nvSpPr>
+        <p:spPr>
+          <a:xfrm>
+            <a:off x="2557927" y="4663158"/>
+            <a:ext cx="1637211" cy="276999"/>
+          </a:xfrm>
+          <a:prstGeom prst="rect">
+            <a:avLst/>
+          </a:prstGeom>
+          <a:noFill/>
+        </p:spPr>
+        <p:txBody>
+          <a:bodyPr wrap="square" rtlCol="0">
+            <a:spAutoFit/>
+          </a:bodyPr>
+          <a:lstStyle/>
+          <a:p>
+            <a:r>
+              <a:rPr lang="ru-RU" sz="1200" dirty="0">
+                <a:latin typeface="Arial" panose="020B0604020202020204" pitchFamily="34" charset="0"/>
+                <a:cs typeface="Arial" panose="020B0604020202020204" pitchFamily="34" charset="0"/>
+              </a:rPr>
+              <a:t>Таблица </a:t>
+            </a:r>
+            <a:r>
+              <a:rPr lang="en-US" sz="1200" dirty="0">
+                <a:latin typeface="Arial" panose="020B0604020202020204" pitchFamily="34" charset="0"/>
+                <a:cs typeface="Arial" panose="020B0604020202020204" pitchFamily="34" charset="0"/>
+              </a:rPr>
+              <a:t>user</a:t>
+            </a:r>
+            <a:endParaRPr lang="ru-RU" sz="1200" dirty="0">
+              <a:latin typeface="Arial" panose="020B0604020202020204" pitchFamily="34" charset="0"/>
+              <a:cs typeface="Arial" panose="020B0604020202020204" pitchFamily="34" charset="0"/>
+            </a:endParaRPr>
+          </a:p>
+        </p:txBody>
+      </p:sp>
+      <p:sp>
+        <p:nvSpPr>
+          <p:cNvPr id="12" name="TextBox 11">
+            <a:extLst>
+              <a:ext uri="{FF2B5EF4-FFF2-40B4-BE49-F238E27FC236}">
+                <a16:creationId xmlns:a16="http://schemas.microsoft.com/office/drawing/2014/main" id="{D08E8C1C-9B32-4412-8753-F2B32C6217BF}"/>
+              </a:ext>
+            </a:extLst>
+          </p:cNvPr>
+          <p:cNvSpPr txBox="1"/>
+          <p:nvPr/>
+        </p:nvSpPr>
+        <p:spPr>
+          <a:xfrm>
+            <a:off x="7996862" y="4606519"/>
+            <a:ext cx="1637211" cy="276999"/>
+          </a:xfrm>
+          <a:prstGeom prst="rect">
+            <a:avLst/>
+          </a:prstGeom>
+          <a:noFill/>
+        </p:spPr>
+        <p:txBody>
+          <a:bodyPr wrap="square" rtlCol="0">
+            <a:spAutoFit/>
+          </a:bodyPr>
+          <a:lstStyle/>
+          <a:p>
+            <a:r>
+              <a:rPr lang="ru-RU" sz="1200" dirty="0">
+                <a:latin typeface="Arial" panose="020B0604020202020204" pitchFamily="34" charset="0"/>
+                <a:cs typeface="Arial" panose="020B0604020202020204" pitchFamily="34" charset="0"/>
+              </a:rPr>
+              <a:t>Таблица </a:t>
+            </a:r>
+            <a:r>
+              <a:rPr lang="en-US" sz="1200" dirty="0">
+                <a:latin typeface="Arial" panose="020B0604020202020204" pitchFamily="34" charset="0"/>
+                <a:cs typeface="Arial" panose="020B0604020202020204" pitchFamily="34" charset="0"/>
+              </a:rPr>
+              <a:t>requests</a:t>
+            </a:r>
+            <a:endParaRPr lang="ru-RU" sz="1200" dirty="0">
+              <a:latin typeface="Arial" panose="020B0604020202020204" pitchFamily="34" charset="0"/>
+              <a:cs typeface="Arial" panose="020B0604020202020204" pitchFamily="34" charset="0"/>
+            </a:endParaRPr>
           </a:p>
         </p:txBody>
       </p:sp>
       <p:pic>
         <p:nvPicPr>
-          <p:cNvPr id="9" name="Рисунок 8">
+          <p:cNvPr id="5" name="Рисунок 4">
             <a:extLst>
               <a:ext uri="{FF2B5EF4-FFF2-40B4-BE49-F238E27FC236}">
-                <a16:creationId xmlns:a16="http://schemas.microsoft.com/office/drawing/2014/main" id="{E0D2C414-BE23-4C33-BAA2-8ADBE1EAB895}"/>
+                <a16:creationId xmlns:a16="http://schemas.microsoft.com/office/drawing/2014/main" id="{D5CFFE00-8759-45F9-901E-326A596EFBE6}"/>
               </a:ext>
             </a:extLst>
           </p:cNvPr>
@@ -11949,8 +12696,8 @@
         </p:blipFill>
         <p:spPr>
           <a:xfrm>
-            <a:off x="1123407" y="1509590"/>
-            <a:ext cx="4506252" cy="3169738"/>
+            <a:off x="872487" y="1509590"/>
+            <a:ext cx="4506252" cy="3190976"/>
           </a:xfrm>
           <a:prstGeom prst="rect">
             <a:avLst/>
@@ -11959,10 +12706,10 @@
       </p:pic>
       <p:pic>
         <p:nvPicPr>
-          <p:cNvPr id="10" name="Рисунок 9">
+          <p:cNvPr id="7" name="Рисунок 6">
             <a:extLst>
               <a:ext uri="{FF2B5EF4-FFF2-40B4-BE49-F238E27FC236}">
-                <a16:creationId xmlns:a16="http://schemas.microsoft.com/office/drawing/2014/main" id="{C932AA27-C876-432F-A0CA-D7A900F677B8}"/>
+                <a16:creationId xmlns:a16="http://schemas.microsoft.com/office/drawing/2014/main" id="{65F441F5-4B5E-4557-B9D9-EA80AED9A7DC}"/>
               </a:ext>
             </a:extLst>
           </p:cNvPr>
@@ -11979,112 +12726,14 @@
         </p:blipFill>
         <p:spPr>
           <a:xfrm>
-            <a:off x="6562342" y="1509590"/>
-            <a:ext cx="4506252" cy="3169738"/>
+            <a:off x="6603887" y="1509590"/>
+            <a:ext cx="4506252" cy="3108086"/>
           </a:xfrm>
           <a:prstGeom prst="rect">
             <a:avLst/>
           </a:prstGeom>
         </p:spPr>
       </p:pic>
-      <p:sp>
-        <p:nvSpPr>
-          <p:cNvPr id="11" name="TextBox 10">
-            <a:extLst>
-              <a:ext uri="{FF2B5EF4-FFF2-40B4-BE49-F238E27FC236}">
-                <a16:creationId xmlns:a16="http://schemas.microsoft.com/office/drawing/2014/main" id="{4B153221-E659-4ED6-B7FD-ACA2EBA9E463}"/>
-              </a:ext>
-            </a:extLst>
-          </p:cNvPr>
-          <p:cNvSpPr txBox="1"/>
-          <p:nvPr/>
-        </p:nvSpPr>
-        <p:spPr>
-          <a:xfrm>
-            <a:off x="2557925" y="4606519"/>
-            <a:ext cx="1637211" cy="276999"/>
-          </a:xfrm>
-          <a:prstGeom prst="rect">
-            <a:avLst/>
-          </a:prstGeom>
-          <a:noFill/>
-        </p:spPr>
-        <p:txBody>
-          <a:bodyPr wrap="square" rtlCol="0">
-            <a:spAutoFit/>
-          </a:bodyPr>
-          <a:lstStyle/>
-          <a:p>
-            <a:r>
-              <a:rPr lang="ru-RU" sz="1200" dirty="0">
-                <a:latin typeface="Arial" panose="020B0604020202020204" pitchFamily="34" charset="0"/>
-                <a:cs typeface="Arial" panose="020B0604020202020204" pitchFamily="34" charset="0"/>
-              </a:rPr>
-              <a:t>Таблица </a:t>
-            </a:r>
-            <a:r>
-              <a:rPr lang="en-US" sz="1200" dirty="0">
-                <a:latin typeface="Arial" panose="020B0604020202020204" pitchFamily="34" charset="0"/>
-                <a:cs typeface="Arial" panose="020B0604020202020204" pitchFamily="34" charset="0"/>
-              </a:rPr>
-              <a:t>User</a:t>
-            </a:r>
-            <a:endParaRPr lang="ru-RU" sz="1200" dirty="0">
-              <a:latin typeface="Arial" panose="020B0604020202020204" pitchFamily="34" charset="0"/>
-              <a:cs typeface="Arial" panose="020B0604020202020204" pitchFamily="34" charset="0"/>
-            </a:endParaRPr>
-          </a:p>
-        </p:txBody>
-      </p:sp>
-      <p:sp>
-        <p:nvSpPr>
-          <p:cNvPr id="12" name="TextBox 11">
-            <a:extLst>
-              <a:ext uri="{FF2B5EF4-FFF2-40B4-BE49-F238E27FC236}">
-                <a16:creationId xmlns:a16="http://schemas.microsoft.com/office/drawing/2014/main" id="{D08E8C1C-9B32-4412-8753-F2B32C6217BF}"/>
-              </a:ext>
-            </a:extLst>
-          </p:cNvPr>
-          <p:cNvSpPr txBox="1"/>
-          <p:nvPr/>
-        </p:nvSpPr>
-        <p:spPr>
-          <a:xfrm>
-            <a:off x="7996862" y="4606519"/>
-            <a:ext cx="1637211" cy="276999"/>
-          </a:xfrm>
-          <a:prstGeom prst="rect">
-            <a:avLst/>
-          </a:prstGeom>
-          <a:noFill/>
-        </p:spPr>
-        <p:txBody>
-          <a:bodyPr wrap="square" rtlCol="0">
-            <a:spAutoFit/>
-          </a:bodyPr>
-          <a:lstStyle/>
-          <a:p>
-            <a:r>
-              <a:rPr lang="ru-RU" sz="1200" dirty="0">
-                <a:latin typeface="Arial" panose="020B0604020202020204" pitchFamily="34" charset="0"/>
-                <a:cs typeface="Arial" panose="020B0604020202020204" pitchFamily="34" charset="0"/>
-              </a:rPr>
-              <a:t>Таблица </a:t>
-            </a:r>
-            <a:r>
-              <a:rPr lang="en-US" sz="1200" dirty="0">
-                <a:latin typeface="Arial" panose="020B0604020202020204" pitchFamily="34" charset="0"/>
-                <a:cs typeface="Arial" panose="020B0604020202020204" pitchFamily="34" charset="0"/>
-              </a:rPr>
-              <a:t>Booking</a:t>
-            </a:r>
-            <a:endParaRPr lang="ru-RU" sz="1200" dirty="0">
-              <a:latin typeface="Arial" panose="020B0604020202020204" pitchFamily="34" charset="0"/>
-              <a:cs typeface="Arial" panose="020B0604020202020204" pitchFamily="34" charset="0"/>
-            </a:endParaRPr>
-          </a:p>
-        </p:txBody>
-      </p:sp>
     </p:spTree>
     <p:extLst>
       <p:ext uri="{BB962C8B-B14F-4D97-AF65-F5344CB8AC3E}">
